--- a/In Christ Alone.pptx
+++ b/In Christ Alone.pptx
@@ -7,13 +7,21 @@
   <p:sldIdLst>
     <p:sldId id="274" r:id="rId2"/>
     <p:sldId id="280" r:id="rId3"/>
-    <p:sldId id="281" r:id="rId4"/>
-    <p:sldId id="282" r:id="rId5"/>
-    <p:sldId id="283" r:id="rId6"/>
-    <p:sldId id="284" r:id="rId7"/>
-    <p:sldId id="285" r:id="rId8"/>
-    <p:sldId id="286" r:id="rId9"/>
-    <p:sldId id="287" r:id="rId10"/>
+    <p:sldId id="288" r:id="rId4"/>
+    <p:sldId id="281" r:id="rId5"/>
+    <p:sldId id="289" r:id="rId6"/>
+    <p:sldId id="282" r:id="rId7"/>
+    <p:sldId id="290" r:id="rId8"/>
+    <p:sldId id="283" r:id="rId9"/>
+    <p:sldId id="291" r:id="rId10"/>
+    <p:sldId id="284" r:id="rId11"/>
+    <p:sldId id="292" r:id="rId12"/>
+    <p:sldId id="285" r:id="rId13"/>
+    <p:sldId id="293" r:id="rId14"/>
+    <p:sldId id="286" r:id="rId15"/>
+    <p:sldId id="294" r:id="rId16"/>
+    <p:sldId id="287" r:id="rId17"/>
+    <p:sldId id="295" r:id="rId18"/>
   </p:sldIdLst>
   <p:sldSz cx="9144000" cy="6858000" type="screen4x3"/>
   <p:notesSz cx="6858000" cy="9144000"/>
@@ -251,7 +259,7 @@
           <a:p>
             <a:fld id="{E759A0DE-F190-5444-87AC-4719D5F20D15}" type="datetimeFigureOut">
               <a:rPr lang="en-US" smtClean="0"/>
-              <a:t>9/24/26</a:t>
+              <a:t>10/1/26</a:t>
             </a:fld>
             <a:endParaRPr lang="en-US"/>
           </a:p>
@@ -421,7 +429,7 @@
           <a:p>
             <a:fld id="{E759A0DE-F190-5444-87AC-4719D5F20D15}" type="datetimeFigureOut">
               <a:rPr lang="en-US" smtClean="0"/>
-              <a:t>9/24/26</a:t>
+              <a:t>10/1/26</a:t>
             </a:fld>
             <a:endParaRPr lang="en-US"/>
           </a:p>
@@ -601,7 +609,7 @@
           <a:p>
             <a:fld id="{E759A0DE-F190-5444-87AC-4719D5F20D15}" type="datetimeFigureOut">
               <a:rPr lang="en-US" smtClean="0"/>
-              <a:t>9/24/26</a:t>
+              <a:t>10/1/26</a:t>
             </a:fld>
             <a:endParaRPr lang="en-US"/>
           </a:p>
@@ -771,7 +779,7 @@
           <a:p>
             <a:fld id="{E759A0DE-F190-5444-87AC-4719D5F20D15}" type="datetimeFigureOut">
               <a:rPr lang="en-US" smtClean="0"/>
-              <a:t>9/24/26</a:t>
+              <a:t>10/1/26</a:t>
             </a:fld>
             <a:endParaRPr lang="en-US"/>
           </a:p>
@@ -1017,7 +1025,7 @@
           <a:p>
             <a:fld id="{E759A0DE-F190-5444-87AC-4719D5F20D15}" type="datetimeFigureOut">
               <a:rPr lang="en-US" smtClean="0"/>
-              <a:t>9/24/26</a:t>
+              <a:t>10/1/26</a:t>
             </a:fld>
             <a:endParaRPr lang="en-US"/>
           </a:p>
@@ -1249,7 +1257,7 @@
           <a:p>
             <a:fld id="{E759A0DE-F190-5444-87AC-4719D5F20D15}" type="datetimeFigureOut">
               <a:rPr lang="en-US" smtClean="0"/>
-              <a:t>9/24/26</a:t>
+              <a:t>10/1/26</a:t>
             </a:fld>
             <a:endParaRPr lang="en-US"/>
           </a:p>
@@ -1616,7 +1624,7 @@
           <a:p>
             <a:fld id="{E759A0DE-F190-5444-87AC-4719D5F20D15}" type="datetimeFigureOut">
               <a:rPr lang="en-US" smtClean="0"/>
-              <a:t>9/24/26</a:t>
+              <a:t>10/1/26</a:t>
             </a:fld>
             <a:endParaRPr lang="en-US"/>
           </a:p>
@@ -1734,7 +1742,7 @@
           <a:p>
             <a:fld id="{E759A0DE-F190-5444-87AC-4719D5F20D15}" type="datetimeFigureOut">
               <a:rPr lang="en-US" smtClean="0"/>
-              <a:t>9/24/26</a:t>
+              <a:t>10/1/26</a:t>
             </a:fld>
             <a:endParaRPr lang="en-US"/>
           </a:p>
@@ -1829,7 +1837,7 @@
           <a:p>
             <a:fld id="{E759A0DE-F190-5444-87AC-4719D5F20D15}" type="datetimeFigureOut">
               <a:rPr lang="en-US" smtClean="0"/>
-              <a:t>9/24/26</a:t>
+              <a:t>10/1/26</a:t>
             </a:fld>
             <a:endParaRPr lang="en-US"/>
           </a:p>
@@ -2106,7 +2114,7 @@
           <a:p>
             <a:fld id="{E759A0DE-F190-5444-87AC-4719D5F20D15}" type="datetimeFigureOut">
               <a:rPr lang="en-US" smtClean="0"/>
-              <a:t>9/24/26</a:t>
+              <a:t>10/1/26</a:t>
             </a:fld>
             <a:endParaRPr lang="en-US"/>
           </a:p>
@@ -2363,7 +2371,7 @@
           <a:p>
             <a:fld id="{E759A0DE-F190-5444-87AC-4719D5F20D15}" type="datetimeFigureOut">
               <a:rPr lang="en-US" smtClean="0"/>
-              <a:t>9/24/26</a:t>
+              <a:t>10/1/26</a:t>
             </a:fld>
             <a:endParaRPr lang="en-US"/>
           </a:p>
@@ -2576,7 +2584,7 @@
           <a:p>
             <a:fld id="{E759A0DE-F190-5444-87AC-4719D5F20D15}" type="datetimeFigureOut">
               <a:rPr lang="en-US" smtClean="0"/>
-              <a:t>9/24/26</a:t>
+              <a:t>10/1/26</a:t>
             </a:fld>
             <a:endParaRPr lang="en-US"/>
           </a:p>
@@ -3112,6 +3120,1225 @@
 </p:sld>
 </file>
 
+<file path=ppt/slides/slide10.xml><?xml version="1.0" encoding="utf-8"?>
+<p:sld xmlns:a="http://schemas.openxmlformats.org/drawingml/2006/main" xmlns:r="http://schemas.openxmlformats.org/officeDocument/2006/relationships" xmlns:p="http://schemas.openxmlformats.org/presentationml/2006/main">
+  <p:cSld>
+    <p:bg>
+      <p:bgPr>
+        <a:solidFill>
+          <a:schemeClr val="tx1"/>
+        </a:solidFill>
+        <a:effectLst/>
+      </p:bgPr>
+    </p:bg>
+    <p:spTree>
+      <p:nvGrpSpPr>
+        <p:cNvPr id="1" name="">
+          <a:extLst>
+            <a:ext uri="{FF2B5EF4-FFF2-40B4-BE49-F238E27FC236}">
+              <a16:creationId xmlns:a16="http://schemas.microsoft.com/office/drawing/2014/main" id="{C13C3BBB-7C3C-80B5-E4A0-353049B1067D}"/>
+            </a:ext>
+          </a:extLst>
+        </p:cNvPr>
+        <p:cNvGrpSpPr/>
+        <p:nvPr/>
+      </p:nvGrpSpPr>
+      <p:grpSpPr>
+        <a:xfrm>
+          <a:off x="0" y="0"/>
+          <a:ext cx="0" cy="0"/>
+          <a:chOff x="0" y="0"/>
+          <a:chExt cx="0" cy="0"/>
+        </a:xfrm>
+      </p:grpSpPr>
+      <p:sp>
+        <p:nvSpPr>
+          <p:cNvPr id="3" name="Subtitle 2">
+            <a:extLst>
+              <a:ext uri="{FF2B5EF4-FFF2-40B4-BE49-F238E27FC236}">
+                <a16:creationId xmlns:a16="http://schemas.microsoft.com/office/drawing/2014/main" id="{60DF2A09-4C27-862D-54B0-293E9F271CB0}"/>
+              </a:ext>
+            </a:extLst>
+          </p:cNvPr>
+          <p:cNvSpPr>
+            <a:spLocks noGrp="1"/>
+          </p:cNvSpPr>
+          <p:nvPr>
+            <p:ph type="subTitle" idx="1"/>
+          </p:nvPr>
+        </p:nvSpPr>
+        <p:spPr>
+          <a:xfrm>
+            <a:off x="84221" y="213360"/>
+            <a:ext cx="8891337" cy="6416040"/>
+          </a:xfrm>
+        </p:spPr>
+        <p:txBody>
+          <a:bodyPr>
+            <a:noAutofit/>
+          </a:bodyPr>
+          <a:lstStyle/>
+          <a:p>
+            <a:endParaRPr lang="en-US" sz="5400" dirty="0">
+              <a:solidFill>
+                <a:schemeClr val="bg1"/>
+              </a:solidFill>
+              <a:latin typeface="Avenir Medium" panose="02000503020000020003" pitchFamily="2" charset="0"/>
+              <a:ea typeface="Bodoni Ornaments" pitchFamily="2" charset="0"/>
+            </a:endParaRPr>
+          </a:p>
+          <a:p>
+            <a:r>
+              <a:rPr lang="en-US" sz="5400" dirty="0">
+                <a:solidFill>
+                  <a:schemeClr val="bg1"/>
+                </a:solidFill>
+                <a:latin typeface="Avenir Medium" panose="02000503020000020003" pitchFamily="2" charset="0"/>
+                <a:ea typeface="Bodoni Ornaments" pitchFamily="2" charset="0"/>
+              </a:rPr>
+              <a:t>There in the ground </a:t>
+            </a:r>
+          </a:p>
+          <a:p>
+            <a:r>
+              <a:rPr lang="en-US" sz="5400" dirty="0">
+                <a:solidFill>
+                  <a:schemeClr val="bg1"/>
+                </a:solidFill>
+                <a:latin typeface="Avenir Medium" panose="02000503020000020003" pitchFamily="2" charset="0"/>
+                <a:ea typeface="Bodoni Ornaments" pitchFamily="2" charset="0"/>
+              </a:rPr>
+              <a:t>His body lay</a:t>
+            </a:r>
+          </a:p>
+          <a:p>
+            <a:endParaRPr lang="en-US" sz="5400" dirty="0">
+              <a:solidFill>
+                <a:schemeClr val="bg1"/>
+              </a:solidFill>
+              <a:latin typeface="Avenir Medium" panose="02000503020000020003" pitchFamily="2" charset="0"/>
+              <a:ea typeface="Bodoni Ornaments" pitchFamily="2" charset="0"/>
+            </a:endParaRPr>
+          </a:p>
+          <a:p>
+            <a:r>
+              <a:rPr lang="en-US" sz="5400" dirty="0">
+                <a:solidFill>
+                  <a:schemeClr val="bg1"/>
+                </a:solidFill>
+                <a:latin typeface="Avenir Medium" panose="02000503020000020003" pitchFamily="2" charset="0"/>
+                <a:ea typeface="Bodoni Ornaments" pitchFamily="2" charset="0"/>
+              </a:rPr>
+              <a:t>Light of the world by darkness slain</a:t>
+            </a:r>
+          </a:p>
+          <a:p>
+            <a:endParaRPr lang="en-US" sz="5400" dirty="0">
+              <a:solidFill>
+                <a:schemeClr val="bg1"/>
+              </a:solidFill>
+              <a:latin typeface="Avenir Medium" panose="02000503020000020003" pitchFamily="2" charset="0"/>
+              <a:ea typeface="Bodoni Ornaments" pitchFamily="2" charset="0"/>
+            </a:endParaRPr>
+          </a:p>
+          <a:p>
+            <a:endParaRPr lang="en-US" sz="5400" dirty="0">
+              <a:solidFill>
+                <a:schemeClr val="bg1"/>
+              </a:solidFill>
+              <a:latin typeface="Avenir Medium" panose="02000503020000020003" pitchFamily="2" charset="0"/>
+              <a:ea typeface="Bodoni Ornaments" pitchFamily="2" charset="0"/>
+            </a:endParaRPr>
+          </a:p>
+        </p:txBody>
+      </p:sp>
+    </p:spTree>
+    <p:extLst>
+      <p:ext uri="{BB962C8B-B14F-4D97-AF65-F5344CB8AC3E}">
+        <p14:creationId xmlns:p14="http://schemas.microsoft.com/office/powerpoint/2010/main" val="1368886024"/>
+      </p:ext>
+    </p:extLst>
+  </p:cSld>
+  <p:clrMapOvr>
+    <a:masterClrMapping/>
+  </p:clrMapOvr>
+</p:sld>
+</file>
+
+<file path=ppt/slides/slide11.xml><?xml version="1.0" encoding="utf-8"?>
+<p:sld xmlns:a="http://schemas.openxmlformats.org/drawingml/2006/main" xmlns:r="http://schemas.openxmlformats.org/officeDocument/2006/relationships" xmlns:p="http://schemas.openxmlformats.org/presentationml/2006/main">
+  <p:cSld>
+    <p:bg>
+      <p:bgPr>
+        <a:solidFill>
+          <a:schemeClr val="tx1"/>
+        </a:solidFill>
+        <a:effectLst/>
+      </p:bgPr>
+    </p:bg>
+    <p:spTree>
+      <p:nvGrpSpPr>
+        <p:cNvPr id="1" name="">
+          <a:extLst>
+            <a:ext uri="{FF2B5EF4-FFF2-40B4-BE49-F238E27FC236}">
+              <a16:creationId xmlns:a16="http://schemas.microsoft.com/office/drawing/2014/main" id="{346F3DC2-953B-C736-F511-0288AD12EFE9}"/>
+            </a:ext>
+          </a:extLst>
+        </p:cNvPr>
+        <p:cNvGrpSpPr/>
+        <p:nvPr/>
+      </p:nvGrpSpPr>
+      <p:grpSpPr>
+        <a:xfrm>
+          <a:off x="0" y="0"/>
+          <a:ext cx="0" cy="0"/>
+          <a:chOff x="0" y="0"/>
+          <a:chExt cx="0" cy="0"/>
+        </a:xfrm>
+      </p:grpSpPr>
+      <p:sp>
+        <p:nvSpPr>
+          <p:cNvPr id="3" name="Subtitle 2">
+            <a:extLst>
+              <a:ext uri="{FF2B5EF4-FFF2-40B4-BE49-F238E27FC236}">
+                <a16:creationId xmlns:a16="http://schemas.microsoft.com/office/drawing/2014/main" id="{6549E7B0-1EBF-CFD7-04B4-DFE78C1B0D35}"/>
+              </a:ext>
+            </a:extLst>
+          </p:cNvPr>
+          <p:cNvSpPr>
+            <a:spLocks noGrp="1"/>
+          </p:cNvSpPr>
+          <p:nvPr>
+            <p:ph type="subTitle" idx="1"/>
+          </p:nvPr>
+        </p:nvSpPr>
+        <p:spPr>
+          <a:xfrm>
+            <a:off x="84221" y="213360"/>
+            <a:ext cx="8891337" cy="6416040"/>
+          </a:xfrm>
+        </p:spPr>
+        <p:txBody>
+          <a:bodyPr>
+            <a:noAutofit/>
+          </a:bodyPr>
+          <a:lstStyle/>
+          <a:p>
+            <a:endParaRPr lang="en-US" sz="5400" dirty="0">
+              <a:solidFill>
+                <a:schemeClr val="bg1"/>
+              </a:solidFill>
+              <a:latin typeface="Avenir Medium" panose="02000503020000020003" pitchFamily="2" charset="0"/>
+              <a:ea typeface="Bodoni Ornaments" pitchFamily="2" charset="0"/>
+            </a:endParaRPr>
+          </a:p>
+          <a:p>
+            <a:r>
+              <a:rPr lang="en-US" sz="5400" dirty="0">
+                <a:solidFill>
+                  <a:schemeClr val="bg1"/>
+                </a:solidFill>
+                <a:latin typeface="Avenir Medium" panose="02000503020000020003" pitchFamily="2" charset="0"/>
+                <a:ea typeface="Bodoni Ornaments" pitchFamily="2" charset="0"/>
+              </a:rPr>
+              <a:t>Then bursting forth </a:t>
+            </a:r>
+          </a:p>
+          <a:p>
+            <a:r>
+              <a:rPr lang="en-US" sz="5400" dirty="0">
+                <a:solidFill>
+                  <a:schemeClr val="bg1"/>
+                </a:solidFill>
+                <a:latin typeface="Avenir Medium" panose="02000503020000020003" pitchFamily="2" charset="0"/>
+                <a:ea typeface="Bodoni Ornaments" pitchFamily="2" charset="0"/>
+              </a:rPr>
+              <a:t>in glorious day</a:t>
+            </a:r>
+          </a:p>
+          <a:p>
+            <a:endParaRPr lang="en-US" sz="5400" dirty="0">
+              <a:solidFill>
+                <a:schemeClr val="bg1"/>
+              </a:solidFill>
+              <a:latin typeface="Avenir Medium" panose="02000503020000020003" pitchFamily="2" charset="0"/>
+              <a:ea typeface="Bodoni Ornaments" pitchFamily="2" charset="0"/>
+            </a:endParaRPr>
+          </a:p>
+          <a:p>
+            <a:r>
+              <a:rPr lang="en-US" sz="5400" dirty="0">
+                <a:solidFill>
+                  <a:schemeClr val="bg1"/>
+                </a:solidFill>
+                <a:latin typeface="Avenir Medium" panose="02000503020000020003" pitchFamily="2" charset="0"/>
+                <a:ea typeface="Bodoni Ornaments" pitchFamily="2" charset="0"/>
+              </a:rPr>
+              <a:t>Up from the grave </a:t>
+            </a:r>
+          </a:p>
+          <a:p>
+            <a:r>
+              <a:rPr lang="en-US" sz="5400" dirty="0">
+                <a:solidFill>
+                  <a:schemeClr val="bg1"/>
+                </a:solidFill>
+                <a:latin typeface="Avenir Medium" panose="02000503020000020003" pitchFamily="2" charset="0"/>
+                <a:ea typeface="Bodoni Ornaments" pitchFamily="2" charset="0"/>
+              </a:rPr>
+              <a:t>He rose again</a:t>
+            </a:r>
+          </a:p>
+          <a:p>
+            <a:endParaRPr lang="en-US" sz="5400" dirty="0">
+              <a:solidFill>
+                <a:schemeClr val="bg1"/>
+              </a:solidFill>
+              <a:latin typeface="Avenir Medium" panose="02000503020000020003" pitchFamily="2" charset="0"/>
+              <a:ea typeface="Bodoni Ornaments" pitchFamily="2" charset="0"/>
+            </a:endParaRPr>
+          </a:p>
+        </p:txBody>
+      </p:sp>
+    </p:spTree>
+    <p:extLst>
+      <p:ext uri="{BB962C8B-B14F-4D97-AF65-F5344CB8AC3E}">
+        <p14:creationId xmlns:p14="http://schemas.microsoft.com/office/powerpoint/2010/main" val="1173283854"/>
+      </p:ext>
+    </p:extLst>
+  </p:cSld>
+  <p:clrMapOvr>
+    <a:masterClrMapping/>
+  </p:clrMapOvr>
+</p:sld>
+</file>
+
+<file path=ppt/slides/slide12.xml><?xml version="1.0" encoding="utf-8"?>
+<p:sld xmlns:a="http://schemas.openxmlformats.org/drawingml/2006/main" xmlns:r="http://schemas.openxmlformats.org/officeDocument/2006/relationships" xmlns:p="http://schemas.openxmlformats.org/presentationml/2006/main">
+  <p:cSld>
+    <p:bg>
+      <p:bgPr>
+        <a:solidFill>
+          <a:schemeClr val="tx1"/>
+        </a:solidFill>
+        <a:effectLst/>
+      </p:bgPr>
+    </p:bg>
+    <p:spTree>
+      <p:nvGrpSpPr>
+        <p:cNvPr id="1" name="">
+          <a:extLst>
+            <a:ext uri="{FF2B5EF4-FFF2-40B4-BE49-F238E27FC236}">
+              <a16:creationId xmlns:a16="http://schemas.microsoft.com/office/drawing/2014/main" id="{FD765EF3-C2FF-F3C9-66CA-B560CA559FAB}"/>
+            </a:ext>
+          </a:extLst>
+        </p:cNvPr>
+        <p:cNvGrpSpPr/>
+        <p:nvPr/>
+      </p:nvGrpSpPr>
+      <p:grpSpPr>
+        <a:xfrm>
+          <a:off x="0" y="0"/>
+          <a:ext cx="0" cy="0"/>
+          <a:chOff x="0" y="0"/>
+          <a:chExt cx="0" cy="0"/>
+        </a:xfrm>
+      </p:grpSpPr>
+      <p:sp>
+        <p:nvSpPr>
+          <p:cNvPr id="3" name="Subtitle 2">
+            <a:extLst>
+              <a:ext uri="{FF2B5EF4-FFF2-40B4-BE49-F238E27FC236}">
+                <a16:creationId xmlns:a16="http://schemas.microsoft.com/office/drawing/2014/main" id="{54D63EE1-8E59-B471-BDE1-9B7BBDF34087}"/>
+              </a:ext>
+            </a:extLst>
+          </p:cNvPr>
+          <p:cNvSpPr>
+            <a:spLocks noGrp="1"/>
+          </p:cNvSpPr>
+          <p:nvPr>
+            <p:ph type="subTitle" idx="1"/>
+          </p:nvPr>
+        </p:nvSpPr>
+        <p:spPr>
+          <a:xfrm>
+            <a:off x="84221" y="213360"/>
+            <a:ext cx="8891337" cy="6416040"/>
+          </a:xfrm>
+        </p:spPr>
+        <p:txBody>
+          <a:bodyPr>
+            <a:noAutofit/>
+          </a:bodyPr>
+          <a:lstStyle/>
+          <a:p>
+            <a:endParaRPr lang="en-US" sz="5400" dirty="0">
+              <a:solidFill>
+                <a:schemeClr val="bg1"/>
+              </a:solidFill>
+              <a:latin typeface="Avenir Medium" panose="02000503020000020003" pitchFamily="2" charset="0"/>
+              <a:ea typeface="Bodoni Ornaments" pitchFamily="2" charset="0"/>
+            </a:endParaRPr>
+          </a:p>
+          <a:p>
+            <a:r>
+              <a:rPr lang="en-US" sz="5400" dirty="0">
+                <a:solidFill>
+                  <a:schemeClr val="bg1"/>
+                </a:solidFill>
+                <a:latin typeface="Avenir Medium" panose="02000503020000020003" pitchFamily="2" charset="0"/>
+                <a:ea typeface="Bodoni Ornaments" pitchFamily="2" charset="0"/>
+              </a:rPr>
+              <a:t>And as He stands </a:t>
+            </a:r>
+          </a:p>
+          <a:p>
+            <a:r>
+              <a:rPr lang="en-US" sz="5400" dirty="0">
+                <a:solidFill>
+                  <a:schemeClr val="bg1"/>
+                </a:solidFill>
+                <a:latin typeface="Avenir Medium" panose="02000503020000020003" pitchFamily="2" charset="0"/>
+                <a:ea typeface="Bodoni Ornaments" pitchFamily="2" charset="0"/>
+              </a:rPr>
+              <a:t>in victory</a:t>
+            </a:r>
+          </a:p>
+          <a:p>
+            <a:endParaRPr lang="en-US" sz="5400" dirty="0">
+              <a:solidFill>
+                <a:schemeClr val="bg1"/>
+              </a:solidFill>
+              <a:latin typeface="Avenir Medium" panose="02000503020000020003" pitchFamily="2" charset="0"/>
+              <a:ea typeface="Bodoni Ornaments" pitchFamily="2" charset="0"/>
+            </a:endParaRPr>
+          </a:p>
+          <a:p>
+            <a:r>
+              <a:rPr lang="en-US" sz="5400" dirty="0">
+                <a:solidFill>
+                  <a:schemeClr val="bg1"/>
+                </a:solidFill>
+                <a:latin typeface="Avenir Medium" panose="02000503020000020003" pitchFamily="2" charset="0"/>
+                <a:ea typeface="Bodoni Ornaments" pitchFamily="2" charset="0"/>
+              </a:rPr>
+              <a:t>Sin's curse has lost </a:t>
+            </a:r>
+          </a:p>
+          <a:p>
+            <a:r>
+              <a:rPr lang="en-US" sz="5400" dirty="0">
+                <a:solidFill>
+                  <a:schemeClr val="bg1"/>
+                </a:solidFill>
+                <a:latin typeface="Avenir Medium" panose="02000503020000020003" pitchFamily="2" charset="0"/>
+                <a:ea typeface="Bodoni Ornaments" pitchFamily="2" charset="0"/>
+              </a:rPr>
+              <a:t>its grip on me</a:t>
+            </a:r>
+          </a:p>
+          <a:p>
+            <a:endParaRPr lang="en-US" sz="5400" dirty="0">
+              <a:solidFill>
+                <a:schemeClr val="bg1"/>
+              </a:solidFill>
+              <a:latin typeface="Avenir Medium" panose="02000503020000020003" pitchFamily="2" charset="0"/>
+              <a:ea typeface="Bodoni Ornaments" pitchFamily="2" charset="0"/>
+            </a:endParaRPr>
+          </a:p>
+          <a:p>
+            <a:endParaRPr lang="en-US" sz="5400" dirty="0">
+              <a:solidFill>
+                <a:schemeClr val="bg1"/>
+              </a:solidFill>
+              <a:latin typeface="Avenir Medium" panose="02000503020000020003" pitchFamily="2" charset="0"/>
+              <a:ea typeface="Bodoni Ornaments" pitchFamily="2" charset="0"/>
+            </a:endParaRPr>
+          </a:p>
+        </p:txBody>
+      </p:sp>
+    </p:spTree>
+    <p:extLst>
+      <p:ext uri="{BB962C8B-B14F-4D97-AF65-F5344CB8AC3E}">
+        <p14:creationId xmlns:p14="http://schemas.microsoft.com/office/powerpoint/2010/main" val="3928842181"/>
+      </p:ext>
+    </p:extLst>
+  </p:cSld>
+  <p:clrMapOvr>
+    <a:masterClrMapping/>
+  </p:clrMapOvr>
+</p:sld>
+</file>
+
+<file path=ppt/slides/slide13.xml><?xml version="1.0" encoding="utf-8"?>
+<p:sld xmlns:a="http://schemas.openxmlformats.org/drawingml/2006/main" xmlns:r="http://schemas.openxmlformats.org/officeDocument/2006/relationships" xmlns:p="http://schemas.openxmlformats.org/presentationml/2006/main">
+  <p:cSld>
+    <p:bg>
+      <p:bgPr>
+        <a:solidFill>
+          <a:schemeClr val="tx1"/>
+        </a:solidFill>
+        <a:effectLst/>
+      </p:bgPr>
+    </p:bg>
+    <p:spTree>
+      <p:nvGrpSpPr>
+        <p:cNvPr id="1" name="">
+          <a:extLst>
+            <a:ext uri="{FF2B5EF4-FFF2-40B4-BE49-F238E27FC236}">
+              <a16:creationId xmlns:a16="http://schemas.microsoft.com/office/drawing/2014/main" id="{4324A621-4C4D-034D-318C-A3716B940810}"/>
+            </a:ext>
+          </a:extLst>
+        </p:cNvPr>
+        <p:cNvGrpSpPr/>
+        <p:nvPr/>
+      </p:nvGrpSpPr>
+      <p:grpSpPr>
+        <a:xfrm>
+          <a:off x="0" y="0"/>
+          <a:ext cx="0" cy="0"/>
+          <a:chOff x="0" y="0"/>
+          <a:chExt cx="0" cy="0"/>
+        </a:xfrm>
+      </p:grpSpPr>
+      <p:sp>
+        <p:nvSpPr>
+          <p:cNvPr id="3" name="Subtitle 2">
+            <a:extLst>
+              <a:ext uri="{FF2B5EF4-FFF2-40B4-BE49-F238E27FC236}">
+                <a16:creationId xmlns:a16="http://schemas.microsoft.com/office/drawing/2014/main" id="{E3A6A626-BA64-12B7-0D2A-1E9A6328BC5E}"/>
+              </a:ext>
+            </a:extLst>
+          </p:cNvPr>
+          <p:cNvSpPr>
+            <a:spLocks noGrp="1"/>
+          </p:cNvSpPr>
+          <p:nvPr>
+            <p:ph type="subTitle" idx="1"/>
+          </p:nvPr>
+        </p:nvSpPr>
+        <p:spPr>
+          <a:xfrm>
+            <a:off x="84221" y="213360"/>
+            <a:ext cx="8891337" cy="6416040"/>
+          </a:xfrm>
+        </p:spPr>
+        <p:txBody>
+          <a:bodyPr>
+            <a:noAutofit/>
+          </a:bodyPr>
+          <a:lstStyle/>
+          <a:p>
+            <a:endParaRPr lang="en-US" sz="5400" dirty="0">
+              <a:solidFill>
+                <a:schemeClr val="bg1"/>
+              </a:solidFill>
+              <a:latin typeface="Avenir Medium" panose="02000503020000020003" pitchFamily="2" charset="0"/>
+              <a:ea typeface="Bodoni Ornaments" pitchFamily="2" charset="0"/>
+            </a:endParaRPr>
+          </a:p>
+          <a:p>
+            <a:r>
+              <a:rPr lang="en-US" sz="5400" dirty="0">
+                <a:solidFill>
+                  <a:schemeClr val="bg1"/>
+                </a:solidFill>
+                <a:latin typeface="Avenir Medium" panose="02000503020000020003" pitchFamily="2" charset="0"/>
+                <a:ea typeface="Bodoni Ornaments" pitchFamily="2" charset="0"/>
+              </a:rPr>
+              <a:t>For I am His and </a:t>
+            </a:r>
+          </a:p>
+          <a:p>
+            <a:r>
+              <a:rPr lang="en-US" sz="5400" dirty="0">
+                <a:solidFill>
+                  <a:schemeClr val="bg1"/>
+                </a:solidFill>
+                <a:latin typeface="Avenir Medium" panose="02000503020000020003" pitchFamily="2" charset="0"/>
+                <a:ea typeface="Bodoni Ornaments" pitchFamily="2" charset="0"/>
+              </a:rPr>
+              <a:t>He is mine</a:t>
+            </a:r>
+          </a:p>
+          <a:p>
+            <a:endParaRPr lang="en-US" sz="5400" dirty="0">
+              <a:solidFill>
+                <a:schemeClr val="bg1"/>
+              </a:solidFill>
+              <a:latin typeface="Avenir Medium" panose="02000503020000020003" pitchFamily="2" charset="0"/>
+              <a:ea typeface="Bodoni Ornaments" pitchFamily="2" charset="0"/>
+            </a:endParaRPr>
+          </a:p>
+          <a:p>
+            <a:r>
+              <a:rPr lang="en-US" sz="5400" dirty="0">
+                <a:solidFill>
+                  <a:schemeClr val="bg1"/>
+                </a:solidFill>
+                <a:latin typeface="Avenir Medium" panose="02000503020000020003" pitchFamily="2" charset="0"/>
+                <a:ea typeface="Bodoni Ornaments" pitchFamily="2" charset="0"/>
+              </a:rPr>
+              <a:t>Bought with the </a:t>
+            </a:r>
+          </a:p>
+          <a:p>
+            <a:r>
+              <a:rPr lang="en-US" sz="5400" dirty="0">
+                <a:solidFill>
+                  <a:schemeClr val="bg1"/>
+                </a:solidFill>
+                <a:latin typeface="Avenir Medium" panose="02000503020000020003" pitchFamily="2" charset="0"/>
+                <a:ea typeface="Bodoni Ornaments" pitchFamily="2" charset="0"/>
+              </a:rPr>
+              <a:t>precious blood of Christ</a:t>
+            </a:r>
+          </a:p>
+          <a:p>
+            <a:endParaRPr lang="en-US" sz="5400" dirty="0">
+              <a:solidFill>
+                <a:schemeClr val="bg1"/>
+              </a:solidFill>
+              <a:latin typeface="Avenir Medium" panose="02000503020000020003" pitchFamily="2" charset="0"/>
+              <a:ea typeface="Bodoni Ornaments" pitchFamily="2" charset="0"/>
+            </a:endParaRPr>
+          </a:p>
+        </p:txBody>
+      </p:sp>
+    </p:spTree>
+    <p:extLst>
+      <p:ext uri="{BB962C8B-B14F-4D97-AF65-F5344CB8AC3E}">
+        <p14:creationId xmlns:p14="http://schemas.microsoft.com/office/powerpoint/2010/main" val="4010174112"/>
+      </p:ext>
+    </p:extLst>
+  </p:cSld>
+  <p:clrMapOvr>
+    <a:masterClrMapping/>
+  </p:clrMapOvr>
+</p:sld>
+</file>
+
+<file path=ppt/slides/slide14.xml><?xml version="1.0" encoding="utf-8"?>
+<p:sld xmlns:a="http://schemas.openxmlformats.org/drawingml/2006/main" xmlns:r="http://schemas.openxmlformats.org/officeDocument/2006/relationships" xmlns:p="http://schemas.openxmlformats.org/presentationml/2006/main">
+  <p:cSld>
+    <p:bg>
+      <p:bgPr>
+        <a:solidFill>
+          <a:schemeClr val="tx1"/>
+        </a:solidFill>
+        <a:effectLst/>
+      </p:bgPr>
+    </p:bg>
+    <p:spTree>
+      <p:nvGrpSpPr>
+        <p:cNvPr id="1" name="">
+          <a:extLst>
+            <a:ext uri="{FF2B5EF4-FFF2-40B4-BE49-F238E27FC236}">
+              <a16:creationId xmlns:a16="http://schemas.microsoft.com/office/drawing/2014/main" id="{3F4BEF13-813B-B3FE-9DEA-CD2FF5E43C11}"/>
+            </a:ext>
+          </a:extLst>
+        </p:cNvPr>
+        <p:cNvGrpSpPr/>
+        <p:nvPr/>
+      </p:nvGrpSpPr>
+      <p:grpSpPr>
+        <a:xfrm>
+          <a:off x="0" y="0"/>
+          <a:ext cx="0" cy="0"/>
+          <a:chOff x="0" y="0"/>
+          <a:chExt cx="0" cy="0"/>
+        </a:xfrm>
+      </p:grpSpPr>
+      <p:sp>
+        <p:nvSpPr>
+          <p:cNvPr id="3" name="Subtitle 2">
+            <a:extLst>
+              <a:ext uri="{FF2B5EF4-FFF2-40B4-BE49-F238E27FC236}">
+                <a16:creationId xmlns:a16="http://schemas.microsoft.com/office/drawing/2014/main" id="{61F13E3C-7D24-C10B-5DD8-9F69A7C145BF}"/>
+              </a:ext>
+            </a:extLst>
+          </p:cNvPr>
+          <p:cNvSpPr>
+            <a:spLocks noGrp="1"/>
+          </p:cNvSpPr>
+          <p:nvPr>
+            <p:ph type="subTitle" idx="1"/>
+          </p:nvPr>
+        </p:nvSpPr>
+        <p:spPr>
+          <a:xfrm>
+            <a:off x="84221" y="213360"/>
+            <a:ext cx="8891337" cy="6416040"/>
+          </a:xfrm>
+        </p:spPr>
+        <p:txBody>
+          <a:bodyPr>
+            <a:noAutofit/>
+          </a:bodyPr>
+          <a:lstStyle/>
+          <a:p>
+            <a:endParaRPr lang="en-US" sz="5400" dirty="0">
+              <a:solidFill>
+                <a:schemeClr val="bg1"/>
+              </a:solidFill>
+              <a:latin typeface="Avenir Medium" panose="02000503020000020003" pitchFamily="2" charset="0"/>
+              <a:ea typeface="Bodoni Ornaments" pitchFamily="2" charset="0"/>
+            </a:endParaRPr>
+          </a:p>
+          <a:p>
+            <a:r>
+              <a:rPr lang="en-US" sz="5400" dirty="0">
+                <a:solidFill>
+                  <a:schemeClr val="bg1"/>
+                </a:solidFill>
+                <a:latin typeface="Avenir Medium" panose="02000503020000020003" pitchFamily="2" charset="0"/>
+                <a:ea typeface="Bodoni Ornaments" pitchFamily="2" charset="0"/>
+              </a:rPr>
+              <a:t>No guilt of life, </a:t>
+            </a:r>
+          </a:p>
+          <a:p>
+            <a:r>
+              <a:rPr lang="en-US" sz="5400" dirty="0">
+                <a:solidFill>
+                  <a:schemeClr val="bg1"/>
+                </a:solidFill>
+                <a:latin typeface="Avenir Medium" panose="02000503020000020003" pitchFamily="2" charset="0"/>
+                <a:ea typeface="Bodoni Ornaments" pitchFamily="2" charset="0"/>
+              </a:rPr>
+              <a:t>no fear in death</a:t>
+            </a:r>
+          </a:p>
+          <a:p>
+            <a:endParaRPr lang="en-US" sz="5400" dirty="0">
+              <a:solidFill>
+                <a:schemeClr val="bg1"/>
+              </a:solidFill>
+              <a:latin typeface="Avenir Medium" panose="02000503020000020003" pitchFamily="2" charset="0"/>
+              <a:ea typeface="Bodoni Ornaments" pitchFamily="2" charset="0"/>
+            </a:endParaRPr>
+          </a:p>
+          <a:p>
+            <a:r>
+              <a:rPr lang="en-US" sz="5400" dirty="0">
+                <a:solidFill>
+                  <a:schemeClr val="bg1"/>
+                </a:solidFill>
+                <a:latin typeface="Avenir Medium" panose="02000503020000020003" pitchFamily="2" charset="0"/>
+                <a:ea typeface="Bodoni Ornaments" pitchFamily="2" charset="0"/>
+              </a:rPr>
+              <a:t>This is the power of </a:t>
+            </a:r>
+          </a:p>
+          <a:p>
+            <a:r>
+              <a:rPr lang="en-US" sz="5400" dirty="0">
+                <a:solidFill>
+                  <a:schemeClr val="bg1"/>
+                </a:solidFill>
+                <a:latin typeface="Avenir Medium" panose="02000503020000020003" pitchFamily="2" charset="0"/>
+                <a:ea typeface="Bodoni Ornaments" pitchFamily="2" charset="0"/>
+              </a:rPr>
+              <a:t>Christ in me</a:t>
+            </a:r>
+          </a:p>
+          <a:p>
+            <a:endParaRPr lang="en-US" sz="5400" dirty="0">
+              <a:solidFill>
+                <a:schemeClr val="bg1"/>
+              </a:solidFill>
+              <a:latin typeface="Avenir Medium" panose="02000503020000020003" pitchFamily="2" charset="0"/>
+              <a:ea typeface="Bodoni Ornaments" pitchFamily="2" charset="0"/>
+            </a:endParaRPr>
+          </a:p>
+          <a:p>
+            <a:endParaRPr lang="en-US" sz="5400" dirty="0">
+              <a:solidFill>
+                <a:schemeClr val="bg1"/>
+              </a:solidFill>
+              <a:latin typeface="Avenir Medium" panose="02000503020000020003" pitchFamily="2" charset="0"/>
+              <a:ea typeface="Bodoni Ornaments" pitchFamily="2" charset="0"/>
+            </a:endParaRPr>
+          </a:p>
+        </p:txBody>
+      </p:sp>
+    </p:spTree>
+    <p:extLst>
+      <p:ext uri="{BB962C8B-B14F-4D97-AF65-F5344CB8AC3E}">
+        <p14:creationId xmlns:p14="http://schemas.microsoft.com/office/powerpoint/2010/main" val="681893626"/>
+      </p:ext>
+    </p:extLst>
+  </p:cSld>
+  <p:clrMapOvr>
+    <a:masterClrMapping/>
+  </p:clrMapOvr>
+</p:sld>
+</file>
+
+<file path=ppt/slides/slide15.xml><?xml version="1.0" encoding="utf-8"?>
+<p:sld xmlns:a="http://schemas.openxmlformats.org/drawingml/2006/main" xmlns:r="http://schemas.openxmlformats.org/officeDocument/2006/relationships" xmlns:p="http://schemas.openxmlformats.org/presentationml/2006/main">
+  <p:cSld>
+    <p:bg>
+      <p:bgPr>
+        <a:solidFill>
+          <a:schemeClr val="tx1"/>
+        </a:solidFill>
+        <a:effectLst/>
+      </p:bgPr>
+    </p:bg>
+    <p:spTree>
+      <p:nvGrpSpPr>
+        <p:cNvPr id="1" name="">
+          <a:extLst>
+            <a:ext uri="{FF2B5EF4-FFF2-40B4-BE49-F238E27FC236}">
+              <a16:creationId xmlns:a16="http://schemas.microsoft.com/office/drawing/2014/main" id="{030C3032-A262-DE75-0486-D88E5D8B776C}"/>
+            </a:ext>
+          </a:extLst>
+        </p:cNvPr>
+        <p:cNvGrpSpPr/>
+        <p:nvPr/>
+      </p:nvGrpSpPr>
+      <p:grpSpPr>
+        <a:xfrm>
+          <a:off x="0" y="0"/>
+          <a:ext cx="0" cy="0"/>
+          <a:chOff x="0" y="0"/>
+          <a:chExt cx="0" cy="0"/>
+        </a:xfrm>
+      </p:grpSpPr>
+      <p:sp>
+        <p:nvSpPr>
+          <p:cNvPr id="3" name="Subtitle 2">
+            <a:extLst>
+              <a:ext uri="{FF2B5EF4-FFF2-40B4-BE49-F238E27FC236}">
+                <a16:creationId xmlns:a16="http://schemas.microsoft.com/office/drawing/2014/main" id="{996D9D45-2ADD-9DC2-7C05-C5B7F87715E8}"/>
+              </a:ext>
+            </a:extLst>
+          </p:cNvPr>
+          <p:cNvSpPr>
+            <a:spLocks noGrp="1"/>
+          </p:cNvSpPr>
+          <p:nvPr>
+            <p:ph type="subTitle" idx="1"/>
+          </p:nvPr>
+        </p:nvSpPr>
+        <p:spPr>
+          <a:xfrm>
+            <a:off x="84221" y="213360"/>
+            <a:ext cx="8891337" cy="6416040"/>
+          </a:xfrm>
+        </p:spPr>
+        <p:txBody>
+          <a:bodyPr>
+            <a:noAutofit/>
+          </a:bodyPr>
+          <a:lstStyle/>
+          <a:p>
+            <a:endParaRPr lang="en-US" sz="5400" dirty="0">
+              <a:solidFill>
+                <a:schemeClr val="bg1"/>
+              </a:solidFill>
+              <a:latin typeface="Avenir Medium" panose="02000503020000020003" pitchFamily="2" charset="0"/>
+              <a:ea typeface="Bodoni Ornaments" pitchFamily="2" charset="0"/>
+            </a:endParaRPr>
+          </a:p>
+          <a:p>
+            <a:r>
+              <a:rPr lang="en-US" sz="5400" dirty="0">
+                <a:solidFill>
+                  <a:schemeClr val="bg1"/>
+                </a:solidFill>
+                <a:latin typeface="Avenir Medium" panose="02000503020000020003" pitchFamily="2" charset="0"/>
+                <a:ea typeface="Bodoni Ornaments" pitchFamily="2" charset="0"/>
+              </a:rPr>
+              <a:t>From life's first cry </a:t>
+            </a:r>
+          </a:p>
+          <a:p>
+            <a:r>
+              <a:rPr lang="en-US" sz="5400" dirty="0">
+                <a:solidFill>
+                  <a:schemeClr val="bg1"/>
+                </a:solidFill>
+                <a:latin typeface="Avenir Medium" panose="02000503020000020003" pitchFamily="2" charset="0"/>
+                <a:ea typeface="Bodoni Ornaments" pitchFamily="2" charset="0"/>
+              </a:rPr>
+              <a:t>to final breath</a:t>
+            </a:r>
+          </a:p>
+          <a:p>
+            <a:r>
+              <a:rPr lang="en-US" sz="5400" dirty="0">
+                <a:solidFill>
+                  <a:schemeClr val="bg1"/>
+                </a:solidFill>
+                <a:latin typeface="Avenir Medium" panose="02000503020000020003" pitchFamily="2" charset="0"/>
+                <a:ea typeface="Bodoni Ornaments" pitchFamily="2" charset="0"/>
+              </a:rPr>
+              <a:t>J</a:t>
+            </a:r>
+          </a:p>
+          <a:p>
+            <a:r>
+              <a:rPr lang="en-US" sz="5400" dirty="0" err="1">
+                <a:solidFill>
+                  <a:schemeClr val="bg1"/>
+                </a:solidFill>
+                <a:latin typeface="Avenir Medium" panose="02000503020000020003" pitchFamily="2" charset="0"/>
+                <a:ea typeface="Bodoni Ornaments" pitchFamily="2" charset="0"/>
+              </a:rPr>
+              <a:t>esus</a:t>
+            </a:r>
+            <a:r>
+              <a:rPr lang="en-US" sz="5400" dirty="0">
+                <a:solidFill>
+                  <a:schemeClr val="bg1"/>
+                </a:solidFill>
+                <a:latin typeface="Avenir Medium" panose="02000503020000020003" pitchFamily="2" charset="0"/>
+                <a:ea typeface="Bodoni Ornaments" pitchFamily="2" charset="0"/>
+              </a:rPr>
+              <a:t> commands my destiny</a:t>
+            </a:r>
+          </a:p>
+          <a:p>
+            <a:endParaRPr lang="en-US" sz="5400" dirty="0">
+              <a:solidFill>
+                <a:schemeClr val="bg1"/>
+              </a:solidFill>
+              <a:latin typeface="Avenir Medium" panose="02000503020000020003" pitchFamily="2" charset="0"/>
+              <a:ea typeface="Bodoni Ornaments" pitchFamily="2" charset="0"/>
+            </a:endParaRPr>
+          </a:p>
+        </p:txBody>
+      </p:sp>
+    </p:spTree>
+    <p:extLst>
+      <p:ext uri="{BB962C8B-B14F-4D97-AF65-F5344CB8AC3E}">
+        <p14:creationId xmlns:p14="http://schemas.microsoft.com/office/powerpoint/2010/main" val="2761194205"/>
+      </p:ext>
+    </p:extLst>
+  </p:cSld>
+  <p:clrMapOvr>
+    <a:masterClrMapping/>
+  </p:clrMapOvr>
+</p:sld>
+</file>
+
+<file path=ppt/slides/slide16.xml><?xml version="1.0" encoding="utf-8"?>
+<p:sld xmlns:a="http://schemas.openxmlformats.org/drawingml/2006/main" xmlns:r="http://schemas.openxmlformats.org/officeDocument/2006/relationships" xmlns:p="http://schemas.openxmlformats.org/presentationml/2006/main">
+  <p:cSld>
+    <p:bg>
+      <p:bgPr>
+        <a:solidFill>
+          <a:schemeClr val="tx1"/>
+        </a:solidFill>
+        <a:effectLst/>
+      </p:bgPr>
+    </p:bg>
+    <p:spTree>
+      <p:nvGrpSpPr>
+        <p:cNvPr id="1" name="">
+          <a:extLst>
+            <a:ext uri="{FF2B5EF4-FFF2-40B4-BE49-F238E27FC236}">
+              <a16:creationId xmlns:a16="http://schemas.microsoft.com/office/drawing/2014/main" id="{41D279BA-1B08-2776-8F03-904F6B909B56}"/>
+            </a:ext>
+          </a:extLst>
+        </p:cNvPr>
+        <p:cNvGrpSpPr/>
+        <p:nvPr/>
+      </p:nvGrpSpPr>
+      <p:grpSpPr>
+        <a:xfrm>
+          <a:off x="0" y="0"/>
+          <a:ext cx="0" cy="0"/>
+          <a:chOff x="0" y="0"/>
+          <a:chExt cx="0" cy="0"/>
+        </a:xfrm>
+      </p:grpSpPr>
+      <p:sp>
+        <p:nvSpPr>
+          <p:cNvPr id="3" name="Subtitle 2">
+            <a:extLst>
+              <a:ext uri="{FF2B5EF4-FFF2-40B4-BE49-F238E27FC236}">
+                <a16:creationId xmlns:a16="http://schemas.microsoft.com/office/drawing/2014/main" id="{1AC98A3D-8585-53B3-0825-C175A8E81B1F}"/>
+              </a:ext>
+            </a:extLst>
+          </p:cNvPr>
+          <p:cNvSpPr>
+            <a:spLocks noGrp="1"/>
+          </p:cNvSpPr>
+          <p:nvPr>
+            <p:ph type="subTitle" idx="1"/>
+          </p:nvPr>
+        </p:nvSpPr>
+        <p:spPr>
+          <a:xfrm>
+            <a:off x="84221" y="213360"/>
+            <a:ext cx="8891337" cy="6416040"/>
+          </a:xfrm>
+        </p:spPr>
+        <p:txBody>
+          <a:bodyPr>
+            <a:noAutofit/>
+          </a:bodyPr>
+          <a:lstStyle/>
+          <a:p>
+            <a:endParaRPr lang="en-US" sz="5400" dirty="0">
+              <a:solidFill>
+                <a:schemeClr val="bg1"/>
+              </a:solidFill>
+              <a:latin typeface="Avenir Medium" panose="02000503020000020003" pitchFamily="2" charset="0"/>
+              <a:ea typeface="Bodoni Ornaments" pitchFamily="2" charset="0"/>
+            </a:endParaRPr>
+          </a:p>
+          <a:p>
+            <a:r>
+              <a:rPr lang="en-US" sz="5400" dirty="0">
+                <a:solidFill>
+                  <a:schemeClr val="bg1"/>
+                </a:solidFill>
+                <a:latin typeface="Avenir Medium" panose="02000503020000020003" pitchFamily="2" charset="0"/>
+                <a:ea typeface="Bodoni Ornaments" pitchFamily="2" charset="0"/>
+              </a:rPr>
+              <a:t>No power of hell, </a:t>
+            </a:r>
+          </a:p>
+          <a:p>
+            <a:r>
+              <a:rPr lang="en-US" sz="5400" dirty="0">
+                <a:solidFill>
+                  <a:schemeClr val="bg1"/>
+                </a:solidFill>
+                <a:latin typeface="Avenir Medium" panose="02000503020000020003" pitchFamily="2" charset="0"/>
+                <a:ea typeface="Bodoni Ornaments" pitchFamily="2" charset="0"/>
+              </a:rPr>
+              <a:t>no scheme of man</a:t>
+            </a:r>
+          </a:p>
+          <a:p>
+            <a:endParaRPr lang="en-US" sz="5400" dirty="0">
+              <a:solidFill>
+                <a:schemeClr val="bg1"/>
+              </a:solidFill>
+              <a:latin typeface="Avenir Medium" panose="02000503020000020003" pitchFamily="2" charset="0"/>
+              <a:ea typeface="Bodoni Ornaments" pitchFamily="2" charset="0"/>
+            </a:endParaRPr>
+          </a:p>
+          <a:p>
+            <a:r>
+              <a:rPr lang="en-US" sz="5400" dirty="0">
+                <a:solidFill>
+                  <a:schemeClr val="bg1"/>
+                </a:solidFill>
+                <a:latin typeface="Avenir Medium" panose="02000503020000020003" pitchFamily="2" charset="0"/>
+                <a:ea typeface="Bodoni Ornaments" pitchFamily="2" charset="0"/>
+              </a:rPr>
+              <a:t>Can ever pluck me </a:t>
+            </a:r>
+          </a:p>
+          <a:p>
+            <a:r>
+              <a:rPr lang="en-US" sz="5400" dirty="0">
+                <a:solidFill>
+                  <a:schemeClr val="bg1"/>
+                </a:solidFill>
+                <a:latin typeface="Avenir Medium" panose="02000503020000020003" pitchFamily="2" charset="0"/>
+                <a:ea typeface="Bodoni Ornaments" pitchFamily="2" charset="0"/>
+              </a:rPr>
+              <a:t>from His hand</a:t>
+            </a:r>
+          </a:p>
+          <a:p>
+            <a:endParaRPr lang="en-US" sz="5400" dirty="0">
+              <a:solidFill>
+                <a:schemeClr val="bg1"/>
+              </a:solidFill>
+              <a:latin typeface="Avenir Medium" panose="02000503020000020003" pitchFamily="2" charset="0"/>
+              <a:ea typeface="Bodoni Ornaments" pitchFamily="2" charset="0"/>
+            </a:endParaRPr>
+          </a:p>
+          <a:p>
+            <a:endParaRPr lang="en-US" sz="5400" dirty="0">
+              <a:solidFill>
+                <a:schemeClr val="bg1"/>
+              </a:solidFill>
+              <a:latin typeface="Avenir Medium" panose="02000503020000020003" pitchFamily="2" charset="0"/>
+              <a:ea typeface="Bodoni Ornaments" pitchFamily="2" charset="0"/>
+            </a:endParaRPr>
+          </a:p>
+        </p:txBody>
+      </p:sp>
+    </p:spTree>
+    <p:extLst>
+      <p:ext uri="{BB962C8B-B14F-4D97-AF65-F5344CB8AC3E}">
+        <p14:creationId xmlns:p14="http://schemas.microsoft.com/office/powerpoint/2010/main" val="1818851335"/>
+      </p:ext>
+    </p:extLst>
+  </p:cSld>
+  <p:clrMapOvr>
+    <a:masterClrMapping/>
+  </p:clrMapOvr>
+</p:sld>
+</file>
+
+<file path=ppt/slides/slide17.xml><?xml version="1.0" encoding="utf-8"?>
+<p:sld xmlns:a="http://schemas.openxmlformats.org/drawingml/2006/main" xmlns:r="http://schemas.openxmlformats.org/officeDocument/2006/relationships" xmlns:p="http://schemas.openxmlformats.org/presentationml/2006/main">
+  <p:cSld>
+    <p:bg>
+      <p:bgPr>
+        <a:solidFill>
+          <a:schemeClr val="tx1"/>
+        </a:solidFill>
+        <a:effectLst/>
+      </p:bgPr>
+    </p:bg>
+    <p:spTree>
+      <p:nvGrpSpPr>
+        <p:cNvPr id="1" name="">
+          <a:extLst>
+            <a:ext uri="{FF2B5EF4-FFF2-40B4-BE49-F238E27FC236}">
+              <a16:creationId xmlns:a16="http://schemas.microsoft.com/office/drawing/2014/main" id="{8A6236EA-9959-5735-4BEF-3D228FBC9001}"/>
+            </a:ext>
+          </a:extLst>
+        </p:cNvPr>
+        <p:cNvGrpSpPr/>
+        <p:nvPr/>
+      </p:nvGrpSpPr>
+      <p:grpSpPr>
+        <a:xfrm>
+          <a:off x="0" y="0"/>
+          <a:ext cx="0" cy="0"/>
+          <a:chOff x="0" y="0"/>
+          <a:chExt cx="0" cy="0"/>
+        </a:xfrm>
+      </p:grpSpPr>
+      <p:sp>
+        <p:nvSpPr>
+          <p:cNvPr id="3" name="Subtitle 2">
+            <a:extLst>
+              <a:ext uri="{FF2B5EF4-FFF2-40B4-BE49-F238E27FC236}">
+                <a16:creationId xmlns:a16="http://schemas.microsoft.com/office/drawing/2014/main" id="{39BE4F9B-7CDC-EFD4-6802-B7B4293C932A}"/>
+              </a:ext>
+            </a:extLst>
+          </p:cNvPr>
+          <p:cNvSpPr>
+            <a:spLocks noGrp="1"/>
+          </p:cNvSpPr>
+          <p:nvPr>
+            <p:ph type="subTitle" idx="1"/>
+          </p:nvPr>
+        </p:nvSpPr>
+        <p:spPr>
+          <a:xfrm>
+            <a:off x="84221" y="213360"/>
+            <a:ext cx="8891337" cy="6416040"/>
+          </a:xfrm>
+        </p:spPr>
+        <p:txBody>
+          <a:bodyPr>
+            <a:noAutofit/>
+          </a:bodyPr>
+          <a:lstStyle/>
+          <a:p>
+            <a:endParaRPr lang="en-US" sz="5400" dirty="0">
+              <a:solidFill>
+                <a:schemeClr val="bg1"/>
+              </a:solidFill>
+              <a:latin typeface="Avenir Medium" panose="02000503020000020003" pitchFamily="2" charset="0"/>
+              <a:ea typeface="Bodoni Ornaments" pitchFamily="2" charset="0"/>
+            </a:endParaRPr>
+          </a:p>
+          <a:p>
+            <a:r>
+              <a:rPr lang="en-US" sz="5400" dirty="0" err="1">
+                <a:solidFill>
+                  <a:schemeClr val="bg1"/>
+                </a:solidFill>
+                <a:latin typeface="Avenir Medium" panose="02000503020000020003" pitchFamily="2" charset="0"/>
+                <a:ea typeface="Bodoni Ornaments" pitchFamily="2" charset="0"/>
+              </a:rPr>
+              <a:t>'Til</a:t>
+            </a:r>
+            <a:r>
+              <a:rPr lang="en-US" sz="5400" dirty="0">
+                <a:solidFill>
+                  <a:schemeClr val="bg1"/>
+                </a:solidFill>
+                <a:latin typeface="Avenir Medium" panose="02000503020000020003" pitchFamily="2" charset="0"/>
+                <a:ea typeface="Bodoni Ornaments" pitchFamily="2" charset="0"/>
+              </a:rPr>
+              <a:t> He returns or </a:t>
+            </a:r>
+          </a:p>
+          <a:p>
+            <a:r>
+              <a:rPr lang="en-US" sz="5400" dirty="0">
+                <a:solidFill>
+                  <a:schemeClr val="bg1"/>
+                </a:solidFill>
+                <a:latin typeface="Avenir Medium" panose="02000503020000020003" pitchFamily="2" charset="0"/>
+                <a:ea typeface="Bodoni Ornaments" pitchFamily="2" charset="0"/>
+              </a:rPr>
+              <a:t>calls me home</a:t>
+            </a:r>
+          </a:p>
+          <a:p>
+            <a:endParaRPr lang="en-US" sz="5400" dirty="0">
+              <a:solidFill>
+                <a:schemeClr val="bg1"/>
+              </a:solidFill>
+              <a:latin typeface="Avenir Medium" panose="02000503020000020003" pitchFamily="2" charset="0"/>
+              <a:ea typeface="Bodoni Ornaments" pitchFamily="2" charset="0"/>
+            </a:endParaRPr>
+          </a:p>
+          <a:p>
+            <a:r>
+              <a:rPr lang="en-US" sz="5400" dirty="0">
+                <a:solidFill>
+                  <a:schemeClr val="bg1"/>
+                </a:solidFill>
+                <a:latin typeface="Avenir Medium" panose="02000503020000020003" pitchFamily="2" charset="0"/>
+                <a:ea typeface="Bodoni Ornaments" pitchFamily="2" charset="0"/>
+              </a:rPr>
+              <a:t>Here in the power of </a:t>
+            </a:r>
+          </a:p>
+          <a:p>
+            <a:r>
+              <a:rPr lang="en-US" sz="5400" dirty="0">
+                <a:solidFill>
+                  <a:schemeClr val="bg1"/>
+                </a:solidFill>
+                <a:latin typeface="Avenir Medium" panose="02000503020000020003" pitchFamily="2" charset="0"/>
+                <a:ea typeface="Bodoni Ornaments" pitchFamily="2" charset="0"/>
+              </a:rPr>
+              <a:t>Christ I'll stand</a:t>
+            </a:r>
+          </a:p>
+          <a:p>
+            <a:endParaRPr lang="en-US" sz="5400" dirty="0">
+              <a:solidFill>
+                <a:schemeClr val="bg1"/>
+              </a:solidFill>
+              <a:latin typeface="Avenir Medium" panose="02000503020000020003" pitchFamily="2" charset="0"/>
+              <a:ea typeface="Bodoni Ornaments" pitchFamily="2" charset="0"/>
+            </a:endParaRPr>
+          </a:p>
+        </p:txBody>
+      </p:sp>
+    </p:spTree>
+    <p:extLst>
+      <p:ext uri="{BB962C8B-B14F-4D97-AF65-F5344CB8AC3E}">
+        <p14:creationId xmlns:p14="http://schemas.microsoft.com/office/powerpoint/2010/main" val="1826398278"/>
+      </p:ext>
+    </p:extLst>
+  </p:cSld>
+  <p:clrMapOvr>
+    <a:masterClrMapping/>
+  </p:clrMapOvr>
+</p:sld>
+</file>
+
 <file path=ppt/slides/slide2.xml><?xml version="1.0" encoding="utf-8"?>
 <p:sld xmlns:a="http://schemas.openxmlformats.org/drawingml/2006/main" xmlns:r="http://schemas.openxmlformats.org/officeDocument/2006/relationships" xmlns:p="http://schemas.openxmlformats.org/presentationml/2006/main">
   <p:cSld>
@@ -3171,7 +4398,7 @@
           </a:bodyPr>
           <a:lstStyle/>
           <a:p>
-            <a:endParaRPr lang="en-US" sz="4000" dirty="0">
+            <a:endParaRPr lang="en-US" sz="5400" dirty="0">
               <a:solidFill>
                 <a:schemeClr val="bg1"/>
               </a:solidFill>
@@ -3181,30 +4408,30 @@
           </a:p>
           <a:p>
             <a:r>
-              <a:rPr lang="en-US" sz="4000" dirty="0">
-                <a:solidFill>
-                  <a:schemeClr val="bg1"/>
-                </a:solidFill>
-                <a:latin typeface="Avenir Medium" panose="02000503020000020003" pitchFamily="2" charset="0"/>
-                <a:ea typeface="Bodoni Ornaments" pitchFamily="2" charset="0"/>
-              </a:rPr>
-              <a:t>In Christ alone my hope is found</a:t>
-            </a:r>
-          </a:p>
-          <a:p>
-            <a:r>
-              <a:rPr lang="en-US" sz="4000" dirty="0">
-                <a:solidFill>
-                  <a:schemeClr val="bg1"/>
-                </a:solidFill>
-                <a:latin typeface="Avenir Medium" panose="02000503020000020003" pitchFamily="2" charset="0"/>
-                <a:ea typeface="Bodoni Ornaments" pitchFamily="2" charset="0"/>
-              </a:rPr>
-              <a:t>He is my light, my strength, my song</a:t>
-            </a:r>
-          </a:p>
-          <a:p>
-            <a:endParaRPr lang="en-US" sz="4000" dirty="0">
+              <a:rPr lang="en-US" sz="5400" dirty="0">
+                <a:solidFill>
+                  <a:schemeClr val="bg1"/>
+                </a:solidFill>
+                <a:latin typeface="Avenir Medium" panose="02000503020000020003" pitchFamily="2" charset="0"/>
+                <a:ea typeface="Bodoni Ornaments" pitchFamily="2" charset="0"/>
+              </a:rPr>
+              <a:t>In Christ alone </a:t>
+            </a:r>
+          </a:p>
+          <a:p>
+            <a:r>
+              <a:rPr lang="en-US" sz="5400" dirty="0">
+                <a:solidFill>
+                  <a:schemeClr val="bg1"/>
+                </a:solidFill>
+                <a:latin typeface="Avenir Medium" panose="02000503020000020003" pitchFamily="2" charset="0"/>
+                <a:ea typeface="Bodoni Ornaments" pitchFamily="2" charset="0"/>
+              </a:rPr>
+              <a:t>my hope is found</a:t>
+            </a:r>
+          </a:p>
+          <a:p>
+            <a:endParaRPr lang="en-US" sz="5400" dirty="0">
               <a:solidFill>
                 <a:schemeClr val="bg1"/>
               </a:solidFill>
@@ -3214,39 +4441,36 @@
           </a:p>
           <a:p>
             <a:r>
-              <a:rPr lang="en-US" sz="4000" dirty="0">
-                <a:solidFill>
-                  <a:schemeClr val="bg1"/>
-                </a:solidFill>
-                <a:latin typeface="Avenir Medium" panose="02000503020000020003" pitchFamily="2" charset="0"/>
-                <a:ea typeface="Bodoni Ornaments" pitchFamily="2" charset="0"/>
-              </a:rPr>
-              <a:t>This cornerstone, this solid ground</a:t>
-            </a:r>
-          </a:p>
-          <a:p>
-            <a:r>
-              <a:rPr lang="en-US" sz="4000" dirty="0">
-                <a:solidFill>
-                  <a:schemeClr val="bg1"/>
-                </a:solidFill>
-                <a:latin typeface="Avenir Medium" panose="02000503020000020003" pitchFamily="2" charset="0"/>
-                <a:ea typeface="Bodoni Ornaments" pitchFamily="2" charset="0"/>
-              </a:rPr>
-              <a:t>Firm through the </a:t>
-            </a:r>
-          </a:p>
-          <a:p>
-            <a:r>
-              <a:rPr lang="en-US" sz="4000" dirty="0">
-                <a:solidFill>
-                  <a:schemeClr val="bg1"/>
-                </a:solidFill>
-                <a:latin typeface="Avenir Medium" panose="02000503020000020003" pitchFamily="2" charset="0"/>
-                <a:ea typeface="Bodoni Ornaments" pitchFamily="2" charset="0"/>
-              </a:rPr>
-              <a:t>fiercest drought and storm</a:t>
-            </a:r>
+              <a:rPr lang="en-US" sz="5400" dirty="0">
+                <a:solidFill>
+                  <a:schemeClr val="bg1"/>
+                </a:solidFill>
+                <a:latin typeface="Avenir Medium" panose="02000503020000020003" pitchFamily="2" charset="0"/>
+                <a:ea typeface="Bodoni Ornaments" pitchFamily="2" charset="0"/>
+              </a:rPr>
+              <a:t>He is my light, </a:t>
+            </a:r>
+          </a:p>
+          <a:p>
+            <a:r>
+              <a:rPr lang="en-US" sz="5400" dirty="0">
+                <a:solidFill>
+                  <a:schemeClr val="bg1"/>
+                </a:solidFill>
+                <a:latin typeface="Avenir Medium" panose="02000503020000020003" pitchFamily="2" charset="0"/>
+                <a:ea typeface="Bodoni Ornaments" pitchFamily="2" charset="0"/>
+              </a:rPr>
+              <a:t>my strength, my song</a:t>
+            </a:r>
+          </a:p>
+          <a:p>
+            <a:endParaRPr lang="en-US" sz="5400" dirty="0">
+              <a:solidFill>
+                <a:schemeClr val="bg1"/>
+              </a:solidFill>
+              <a:latin typeface="Avenir Medium" panose="02000503020000020003" pitchFamily="2" charset="0"/>
+              <a:ea typeface="Bodoni Ornaments" pitchFamily="2" charset="0"/>
+            </a:endParaRPr>
           </a:p>
         </p:txBody>
       </p:sp>
@@ -3264,6 +4488,145 @@
 </file>
 
 <file path=ppt/slides/slide3.xml><?xml version="1.0" encoding="utf-8"?>
+<p:sld xmlns:a="http://schemas.openxmlformats.org/drawingml/2006/main" xmlns:r="http://schemas.openxmlformats.org/officeDocument/2006/relationships" xmlns:p="http://schemas.openxmlformats.org/presentationml/2006/main">
+  <p:cSld>
+    <p:bg>
+      <p:bgPr>
+        <a:solidFill>
+          <a:schemeClr val="tx1"/>
+        </a:solidFill>
+        <a:effectLst/>
+      </p:bgPr>
+    </p:bg>
+    <p:spTree>
+      <p:nvGrpSpPr>
+        <p:cNvPr id="1" name="">
+          <a:extLst>
+            <a:ext uri="{FF2B5EF4-FFF2-40B4-BE49-F238E27FC236}">
+              <a16:creationId xmlns:a16="http://schemas.microsoft.com/office/drawing/2014/main" id="{31F15BA3-58B2-777E-4322-A3680CFF0989}"/>
+            </a:ext>
+          </a:extLst>
+        </p:cNvPr>
+        <p:cNvGrpSpPr/>
+        <p:nvPr/>
+      </p:nvGrpSpPr>
+      <p:grpSpPr>
+        <a:xfrm>
+          <a:off x="0" y="0"/>
+          <a:ext cx="0" cy="0"/>
+          <a:chOff x="0" y="0"/>
+          <a:chExt cx="0" cy="0"/>
+        </a:xfrm>
+      </p:grpSpPr>
+      <p:sp>
+        <p:nvSpPr>
+          <p:cNvPr id="3" name="Subtitle 2">
+            <a:extLst>
+              <a:ext uri="{FF2B5EF4-FFF2-40B4-BE49-F238E27FC236}">
+                <a16:creationId xmlns:a16="http://schemas.microsoft.com/office/drawing/2014/main" id="{2D7A5569-F645-F50C-46F8-D76F341C9069}"/>
+              </a:ext>
+            </a:extLst>
+          </p:cNvPr>
+          <p:cNvSpPr>
+            <a:spLocks noGrp="1"/>
+          </p:cNvSpPr>
+          <p:nvPr>
+            <p:ph type="subTitle" idx="1"/>
+          </p:nvPr>
+        </p:nvSpPr>
+        <p:spPr>
+          <a:xfrm>
+            <a:off x="84221" y="213360"/>
+            <a:ext cx="8891337" cy="6416040"/>
+          </a:xfrm>
+        </p:spPr>
+        <p:txBody>
+          <a:bodyPr>
+            <a:noAutofit/>
+          </a:bodyPr>
+          <a:lstStyle/>
+          <a:p>
+            <a:endParaRPr lang="en-US" sz="5400" dirty="0">
+              <a:solidFill>
+                <a:schemeClr val="bg1"/>
+              </a:solidFill>
+              <a:latin typeface="Avenir Medium" panose="02000503020000020003" pitchFamily="2" charset="0"/>
+              <a:ea typeface="Bodoni Ornaments" pitchFamily="2" charset="0"/>
+            </a:endParaRPr>
+          </a:p>
+          <a:p>
+            <a:r>
+              <a:rPr lang="en-US" sz="5400" dirty="0">
+                <a:solidFill>
+                  <a:schemeClr val="bg1"/>
+                </a:solidFill>
+                <a:latin typeface="Avenir Medium" panose="02000503020000020003" pitchFamily="2" charset="0"/>
+                <a:ea typeface="Bodoni Ornaments" pitchFamily="2" charset="0"/>
+              </a:rPr>
+              <a:t>This cornerstone, </a:t>
+            </a:r>
+          </a:p>
+          <a:p>
+            <a:r>
+              <a:rPr lang="en-US" sz="5400" dirty="0">
+                <a:solidFill>
+                  <a:schemeClr val="bg1"/>
+                </a:solidFill>
+                <a:latin typeface="Avenir Medium" panose="02000503020000020003" pitchFamily="2" charset="0"/>
+                <a:ea typeface="Bodoni Ornaments" pitchFamily="2" charset="0"/>
+              </a:rPr>
+              <a:t>this solid ground</a:t>
+            </a:r>
+          </a:p>
+          <a:p>
+            <a:endParaRPr lang="en-US" sz="5400" dirty="0">
+              <a:solidFill>
+                <a:schemeClr val="bg1"/>
+              </a:solidFill>
+              <a:latin typeface="Avenir Medium" panose="02000503020000020003" pitchFamily="2" charset="0"/>
+              <a:ea typeface="Bodoni Ornaments" pitchFamily="2" charset="0"/>
+            </a:endParaRPr>
+          </a:p>
+          <a:p>
+            <a:r>
+              <a:rPr lang="en-US" sz="5400" dirty="0">
+                <a:solidFill>
+                  <a:schemeClr val="bg1"/>
+                </a:solidFill>
+                <a:latin typeface="Avenir Medium" panose="02000503020000020003" pitchFamily="2" charset="0"/>
+                <a:ea typeface="Bodoni Ornaments" pitchFamily="2" charset="0"/>
+              </a:rPr>
+              <a:t>Firm through the </a:t>
+            </a:r>
+          </a:p>
+          <a:p>
+            <a:r>
+              <a:rPr lang="en-US" sz="5400" dirty="0">
+                <a:solidFill>
+                  <a:schemeClr val="bg1"/>
+                </a:solidFill>
+                <a:latin typeface="Avenir Medium" panose="02000503020000020003" pitchFamily="2" charset="0"/>
+                <a:ea typeface="Bodoni Ornaments" pitchFamily="2" charset="0"/>
+              </a:rPr>
+              <a:t>fiercest drought and storm</a:t>
+            </a:r>
+          </a:p>
+        </p:txBody>
+      </p:sp>
+    </p:spTree>
+    <p:extLst>
+      <p:ext uri="{BB962C8B-B14F-4D97-AF65-F5344CB8AC3E}">
+        <p14:creationId xmlns:p14="http://schemas.microsoft.com/office/powerpoint/2010/main" val="3614110474"/>
+      </p:ext>
+    </p:extLst>
+  </p:cSld>
+  <p:clrMapOvr>
+    <a:masterClrMapping/>
+  </p:clrMapOvr>
+</p:sld>
+</file>
+
+<file path=ppt/slides/slide4.xml><?xml version="1.0" encoding="utf-8"?>
 <p:sld xmlns:a="http://schemas.openxmlformats.org/drawingml/2006/main" xmlns:r="http://schemas.openxmlformats.org/officeDocument/2006/relationships" xmlns:p="http://schemas.openxmlformats.org/presentationml/2006/main">
   <p:cSld>
     <p:bg>
@@ -3322,7 +4685,7 @@
           </a:bodyPr>
           <a:lstStyle/>
           <a:p>
-            <a:endParaRPr lang="en-US" sz="4000" dirty="0">
+            <a:endParaRPr lang="en-US" sz="5400" dirty="0">
               <a:solidFill>
                 <a:schemeClr val="bg1"/>
               </a:solidFill>
@@ -3332,7 +4695,7 @@
           </a:p>
           <a:p>
             <a:r>
-              <a:rPr lang="en-US" sz="4000" dirty="0">
+              <a:rPr lang="en-US" sz="5400" dirty="0">
                 <a:solidFill>
                   <a:schemeClr val="bg1"/>
                 </a:solidFill>
@@ -3344,7 +4707,7 @@
           </a:p>
           <a:p>
             <a:r>
-              <a:rPr lang="en-US" sz="4000" dirty="0">
+              <a:rPr lang="en-US" sz="5400" dirty="0">
                 <a:solidFill>
                   <a:schemeClr val="bg1"/>
                 </a:solidFill>
@@ -3355,7 +4718,7 @@
             </a:r>
           </a:p>
           <a:p>
-            <a:endParaRPr lang="en-US" sz="4000" dirty="0">
+            <a:endParaRPr lang="en-US" sz="5400" dirty="0">
               <a:solidFill>
                 <a:schemeClr val="bg1"/>
               </a:solidFill>
@@ -3365,7 +4728,7 @@
           </a:p>
           <a:p>
             <a:r>
-              <a:rPr lang="en-US" sz="4000" dirty="0">
+              <a:rPr lang="en-US" sz="5400" dirty="0">
                 <a:solidFill>
                   <a:schemeClr val="bg1"/>
                 </a:solidFill>
@@ -3377,7 +4740,7 @@
           </a:p>
           <a:p>
             <a:r>
-              <a:rPr lang="en-US" sz="4000" dirty="0">
+              <a:rPr lang="en-US" sz="5400" dirty="0">
                 <a:solidFill>
                   <a:schemeClr val="bg1"/>
                 </a:solidFill>
@@ -3388,7 +4751,7 @@
             </a:r>
           </a:p>
           <a:p>
-            <a:endParaRPr lang="en-US" sz="4000" dirty="0">
+            <a:endParaRPr lang="en-US" sz="5400" dirty="0">
               <a:solidFill>
                 <a:schemeClr val="bg1"/>
               </a:solidFill>
@@ -3397,31 +4760,7 @@
             </a:endParaRPr>
           </a:p>
           <a:p>
-            <a:r>
-              <a:rPr lang="en-US" sz="4000" dirty="0">
-                <a:solidFill>
-                  <a:schemeClr val="bg1"/>
-                </a:solidFill>
-                <a:latin typeface="Avenir Medium" panose="02000503020000020003" pitchFamily="2" charset="0"/>
-                <a:ea typeface="Bodoni Ornaments" pitchFamily="2" charset="0"/>
-              </a:rPr>
-              <a:t>My comforter, my all in all</a:t>
-            </a:r>
-          </a:p>
-          <a:p>
-            <a:r>
-              <a:rPr lang="en-US" sz="4000" dirty="0">
-                <a:solidFill>
-                  <a:schemeClr val="bg1"/>
-                </a:solidFill>
-                <a:latin typeface="Avenir Medium" panose="02000503020000020003" pitchFamily="2" charset="0"/>
-                <a:ea typeface="Bodoni Ornaments" pitchFamily="2" charset="0"/>
-              </a:rPr>
-              <a:t>Here in the love of Christ I stand</a:t>
-            </a:r>
-          </a:p>
-          <a:p>
-            <a:endParaRPr lang="en-US" sz="4000" dirty="0">
+            <a:endParaRPr lang="en-US" sz="5400" dirty="0">
               <a:solidFill>
                 <a:schemeClr val="bg1"/>
               </a:solidFill>
@@ -3444,7 +4783,146 @@
 </p:sld>
 </file>
 
-<file path=ppt/slides/slide4.xml><?xml version="1.0" encoding="utf-8"?>
+<file path=ppt/slides/slide5.xml><?xml version="1.0" encoding="utf-8"?>
+<p:sld xmlns:a="http://schemas.openxmlformats.org/drawingml/2006/main" xmlns:r="http://schemas.openxmlformats.org/officeDocument/2006/relationships" xmlns:p="http://schemas.openxmlformats.org/presentationml/2006/main">
+  <p:cSld>
+    <p:bg>
+      <p:bgPr>
+        <a:solidFill>
+          <a:schemeClr val="tx1"/>
+        </a:solidFill>
+        <a:effectLst/>
+      </p:bgPr>
+    </p:bg>
+    <p:spTree>
+      <p:nvGrpSpPr>
+        <p:cNvPr id="1" name="">
+          <a:extLst>
+            <a:ext uri="{FF2B5EF4-FFF2-40B4-BE49-F238E27FC236}">
+              <a16:creationId xmlns:a16="http://schemas.microsoft.com/office/drawing/2014/main" id="{A17A4966-F8E3-836C-CED4-40A38703F510}"/>
+            </a:ext>
+          </a:extLst>
+        </p:cNvPr>
+        <p:cNvGrpSpPr/>
+        <p:nvPr/>
+      </p:nvGrpSpPr>
+      <p:grpSpPr>
+        <a:xfrm>
+          <a:off x="0" y="0"/>
+          <a:ext cx="0" cy="0"/>
+          <a:chOff x="0" y="0"/>
+          <a:chExt cx="0" cy="0"/>
+        </a:xfrm>
+      </p:grpSpPr>
+      <p:sp>
+        <p:nvSpPr>
+          <p:cNvPr id="3" name="Subtitle 2">
+            <a:extLst>
+              <a:ext uri="{FF2B5EF4-FFF2-40B4-BE49-F238E27FC236}">
+                <a16:creationId xmlns:a16="http://schemas.microsoft.com/office/drawing/2014/main" id="{D90FBD1A-07CD-0693-E286-BD6C5087CA96}"/>
+              </a:ext>
+            </a:extLst>
+          </p:cNvPr>
+          <p:cNvSpPr>
+            <a:spLocks noGrp="1"/>
+          </p:cNvSpPr>
+          <p:nvPr>
+            <p:ph type="subTitle" idx="1"/>
+          </p:nvPr>
+        </p:nvSpPr>
+        <p:spPr>
+          <a:xfrm>
+            <a:off x="84221" y="213360"/>
+            <a:ext cx="8891337" cy="6416040"/>
+          </a:xfrm>
+        </p:spPr>
+        <p:txBody>
+          <a:bodyPr>
+            <a:noAutofit/>
+          </a:bodyPr>
+          <a:lstStyle/>
+          <a:p>
+            <a:endParaRPr lang="en-US" sz="5400" dirty="0">
+              <a:solidFill>
+                <a:schemeClr val="bg1"/>
+              </a:solidFill>
+              <a:latin typeface="Avenir Medium" panose="02000503020000020003" pitchFamily="2" charset="0"/>
+              <a:ea typeface="Bodoni Ornaments" pitchFamily="2" charset="0"/>
+            </a:endParaRPr>
+          </a:p>
+          <a:p>
+            <a:r>
+              <a:rPr lang="en-US" sz="5400" dirty="0">
+                <a:solidFill>
+                  <a:schemeClr val="bg1"/>
+                </a:solidFill>
+                <a:latin typeface="Avenir Medium" panose="02000503020000020003" pitchFamily="2" charset="0"/>
+                <a:ea typeface="Bodoni Ornaments" pitchFamily="2" charset="0"/>
+              </a:rPr>
+              <a:t>My comforter, </a:t>
+            </a:r>
+          </a:p>
+          <a:p>
+            <a:r>
+              <a:rPr lang="en-US" sz="5400" dirty="0">
+                <a:solidFill>
+                  <a:schemeClr val="bg1"/>
+                </a:solidFill>
+                <a:latin typeface="Avenir Medium" panose="02000503020000020003" pitchFamily="2" charset="0"/>
+                <a:ea typeface="Bodoni Ornaments" pitchFamily="2" charset="0"/>
+              </a:rPr>
+              <a:t>my all in all</a:t>
+            </a:r>
+          </a:p>
+          <a:p>
+            <a:r>
+              <a:rPr lang="en-US" sz="5400" dirty="0">
+                <a:solidFill>
+                  <a:schemeClr val="bg1"/>
+                </a:solidFill>
+                <a:latin typeface="Avenir Medium" panose="02000503020000020003" pitchFamily="2" charset="0"/>
+                <a:ea typeface="Bodoni Ornaments" pitchFamily="2" charset="0"/>
+              </a:rPr>
+              <a:t>Here in the love of Christ </a:t>
+            </a:r>
+          </a:p>
+          <a:p>
+            <a:r>
+              <a:rPr lang="en-US" sz="5400" dirty="0">
+                <a:solidFill>
+                  <a:schemeClr val="bg1"/>
+                </a:solidFill>
+                <a:latin typeface="Avenir Medium" panose="02000503020000020003" pitchFamily="2" charset="0"/>
+                <a:ea typeface="Bodoni Ornaments" pitchFamily="2" charset="0"/>
+              </a:rPr>
+              <a:t>I stand</a:t>
+            </a:r>
+          </a:p>
+          <a:p>
+            <a:endParaRPr lang="en-US" sz="5400" dirty="0">
+              <a:solidFill>
+                <a:schemeClr val="bg1"/>
+              </a:solidFill>
+              <a:latin typeface="Avenir Medium" panose="02000503020000020003" pitchFamily="2" charset="0"/>
+              <a:ea typeface="Bodoni Ornaments" pitchFamily="2" charset="0"/>
+            </a:endParaRPr>
+          </a:p>
+        </p:txBody>
+      </p:sp>
+    </p:spTree>
+    <p:extLst>
+      <p:ext uri="{BB962C8B-B14F-4D97-AF65-F5344CB8AC3E}">
+        <p14:creationId xmlns:p14="http://schemas.microsoft.com/office/powerpoint/2010/main" val="1643092251"/>
+      </p:ext>
+    </p:extLst>
+  </p:cSld>
+  <p:clrMapOvr>
+    <a:masterClrMapping/>
+  </p:clrMapOvr>
+</p:sld>
+</file>
+
+<file path=ppt/slides/slide6.xml><?xml version="1.0" encoding="utf-8"?>
 <p:sld xmlns:a="http://schemas.openxmlformats.org/drawingml/2006/main" xmlns:r="http://schemas.openxmlformats.org/officeDocument/2006/relationships" xmlns:p="http://schemas.openxmlformats.org/presentationml/2006/main">
   <p:cSld>
     <p:bg>
@@ -3503,7 +4981,7 @@
           </a:bodyPr>
           <a:lstStyle/>
           <a:p>
-            <a:endParaRPr lang="en-US" sz="4000" dirty="0">
+            <a:endParaRPr lang="en-US" sz="5400" dirty="0">
               <a:solidFill>
                 <a:schemeClr val="bg1"/>
               </a:solidFill>
@@ -3513,19 +4991,40 @@
           </a:p>
           <a:p>
             <a:r>
-              <a:rPr lang="en-US" sz="4000" dirty="0">
-                <a:solidFill>
-                  <a:schemeClr val="bg1"/>
-                </a:solidFill>
-                <a:latin typeface="Avenir Medium" panose="02000503020000020003" pitchFamily="2" charset="0"/>
-                <a:ea typeface="Bodoni Ornaments" pitchFamily="2" charset="0"/>
-              </a:rPr>
-              <a:t>In Christ alone, who took on flesh</a:t>
-            </a:r>
-          </a:p>
-          <a:p>
-            <a:r>
-              <a:rPr lang="en-US" sz="4000" dirty="0">
+              <a:rPr lang="en-US" sz="5400" dirty="0">
+                <a:solidFill>
+                  <a:schemeClr val="bg1"/>
+                </a:solidFill>
+                <a:latin typeface="Avenir Medium" panose="02000503020000020003" pitchFamily="2" charset="0"/>
+                <a:ea typeface="Bodoni Ornaments" pitchFamily="2" charset="0"/>
+              </a:rPr>
+              <a:t>In Christ alone, </a:t>
+            </a:r>
+          </a:p>
+          <a:p>
+            <a:r>
+              <a:rPr lang="en-US" sz="5400" dirty="0">
+                <a:solidFill>
+                  <a:schemeClr val="bg1"/>
+                </a:solidFill>
+                <a:latin typeface="Avenir Medium" panose="02000503020000020003" pitchFamily="2" charset="0"/>
+                <a:ea typeface="Bodoni Ornaments" pitchFamily="2" charset="0"/>
+              </a:rPr>
+              <a:t>who took on flesh</a:t>
+            </a:r>
+          </a:p>
+          <a:p>
+            <a:br>
+              <a:rPr lang="en-US" sz="5400" dirty="0">
+                <a:solidFill>
+                  <a:schemeClr val="bg1"/>
+                </a:solidFill>
+                <a:latin typeface="Avenir Medium" panose="02000503020000020003" pitchFamily="2" charset="0"/>
+                <a:ea typeface="Bodoni Ornaments" pitchFamily="2" charset="0"/>
+              </a:rPr>
+            </a:br>
+            <a:r>
+              <a:rPr lang="en-US" sz="5400" dirty="0">
                 <a:solidFill>
                   <a:schemeClr val="bg1"/>
                 </a:solidFill>
@@ -3536,7 +5035,7 @@
             </a:r>
           </a:p>
           <a:p>
-            <a:endParaRPr lang="en-US" sz="4000" dirty="0">
+            <a:endParaRPr lang="en-US" sz="5400" dirty="0">
               <a:solidFill>
                 <a:schemeClr val="bg1"/>
               </a:solidFill>
@@ -3545,55 +5044,7 @@
             </a:endParaRPr>
           </a:p>
           <a:p>
-            <a:r>
-              <a:rPr lang="en-US" sz="4000" dirty="0">
-                <a:solidFill>
-                  <a:schemeClr val="bg1"/>
-                </a:solidFill>
-                <a:latin typeface="Avenir Medium" panose="02000503020000020003" pitchFamily="2" charset="0"/>
-                <a:ea typeface="Bodoni Ornaments" pitchFamily="2" charset="0"/>
-              </a:rPr>
-              <a:t>This gift of love </a:t>
-            </a:r>
-          </a:p>
-          <a:p>
-            <a:r>
-              <a:rPr lang="en-US" sz="4000" dirty="0">
-                <a:solidFill>
-                  <a:schemeClr val="bg1"/>
-                </a:solidFill>
-                <a:latin typeface="Avenir Medium" panose="02000503020000020003" pitchFamily="2" charset="0"/>
-                <a:ea typeface="Bodoni Ornaments" pitchFamily="2" charset="0"/>
-              </a:rPr>
-              <a:t>and righteousness</a:t>
-            </a:r>
-          </a:p>
-          <a:p>
-            <a:r>
-              <a:rPr lang="en-US" sz="4000" dirty="0">
-                <a:solidFill>
-                  <a:schemeClr val="bg1"/>
-                </a:solidFill>
-                <a:latin typeface="Avenir Medium" panose="02000503020000020003" pitchFamily="2" charset="0"/>
-                <a:ea typeface="Bodoni Ornaments" pitchFamily="2" charset="0"/>
-              </a:rPr>
-              <a:t>Scorned by the ones </a:t>
-            </a:r>
-          </a:p>
-          <a:p>
-            <a:r>
-              <a:rPr lang="en-US" sz="4000" dirty="0">
-                <a:solidFill>
-                  <a:schemeClr val="bg1"/>
-                </a:solidFill>
-                <a:latin typeface="Avenir Medium" panose="02000503020000020003" pitchFamily="2" charset="0"/>
-                <a:ea typeface="Bodoni Ornaments" pitchFamily="2" charset="0"/>
-              </a:rPr>
-              <a:t>He came to save</a:t>
-            </a:r>
-          </a:p>
-          <a:p>
-            <a:endParaRPr lang="en-US" sz="4000" dirty="0">
+            <a:endParaRPr lang="en-US" sz="5400" dirty="0">
               <a:solidFill>
                 <a:schemeClr val="bg1"/>
               </a:solidFill>
@@ -3616,7 +5067,155 @@
 </p:sld>
 </file>
 
-<file path=ppt/slides/slide5.xml><?xml version="1.0" encoding="utf-8"?>
+<file path=ppt/slides/slide7.xml><?xml version="1.0" encoding="utf-8"?>
+<p:sld xmlns:a="http://schemas.openxmlformats.org/drawingml/2006/main" xmlns:r="http://schemas.openxmlformats.org/officeDocument/2006/relationships" xmlns:p="http://schemas.openxmlformats.org/presentationml/2006/main">
+  <p:cSld>
+    <p:bg>
+      <p:bgPr>
+        <a:solidFill>
+          <a:schemeClr val="tx1"/>
+        </a:solidFill>
+        <a:effectLst/>
+      </p:bgPr>
+    </p:bg>
+    <p:spTree>
+      <p:nvGrpSpPr>
+        <p:cNvPr id="1" name="">
+          <a:extLst>
+            <a:ext uri="{FF2B5EF4-FFF2-40B4-BE49-F238E27FC236}">
+              <a16:creationId xmlns:a16="http://schemas.microsoft.com/office/drawing/2014/main" id="{4880A1D3-0483-FC96-BAE9-5FA7A480F9E0}"/>
+            </a:ext>
+          </a:extLst>
+        </p:cNvPr>
+        <p:cNvGrpSpPr/>
+        <p:nvPr/>
+      </p:nvGrpSpPr>
+      <p:grpSpPr>
+        <a:xfrm>
+          <a:off x="0" y="0"/>
+          <a:ext cx="0" cy="0"/>
+          <a:chOff x="0" y="0"/>
+          <a:chExt cx="0" cy="0"/>
+        </a:xfrm>
+      </p:grpSpPr>
+      <p:sp>
+        <p:nvSpPr>
+          <p:cNvPr id="3" name="Subtitle 2">
+            <a:extLst>
+              <a:ext uri="{FF2B5EF4-FFF2-40B4-BE49-F238E27FC236}">
+                <a16:creationId xmlns:a16="http://schemas.microsoft.com/office/drawing/2014/main" id="{F61E960A-2F14-7C9B-19EC-24CC82DADE26}"/>
+              </a:ext>
+            </a:extLst>
+          </p:cNvPr>
+          <p:cNvSpPr>
+            <a:spLocks noGrp="1"/>
+          </p:cNvSpPr>
+          <p:nvPr>
+            <p:ph type="subTitle" idx="1"/>
+          </p:nvPr>
+        </p:nvSpPr>
+        <p:spPr>
+          <a:xfrm>
+            <a:off x="84221" y="213360"/>
+            <a:ext cx="8891337" cy="6416040"/>
+          </a:xfrm>
+        </p:spPr>
+        <p:txBody>
+          <a:bodyPr>
+            <a:noAutofit/>
+          </a:bodyPr>
+          <a:lstStyle/>
+          <a:p>
+            <a:endParaRPr lang="en-US" sz="5400" dirty="0">
+              <a:solidFill>
+                <a:schemeClr val="bg1"/>
+              </a:solidFill>
+              <a:latin typeface="Avenir Medium" panose="02000503020000020003" pitchFamily="2" charset="0"/>
+              <a:ea typeface="Bodoni Ornaments" pitchFamily="2" charset="0"/>
+            </a:endParaRPr>
+          </a:p>
+          <a:p>
+            <a:r>
+              <a:rPr lang="en-US" sz="5400" dirty="0">
+                <a:solidFill>
+                  <a:schemeClr val="bg1"/>
+                </a:solidFill>
+                <a:latin typeface="Avenir Medium" panose="02000503020000020003" pitchFamily="2" charset="0"/>
+                <a:ea typeface="Bodoni Ornaments" pitchFamily="2" charset="0"/>
+              </a:rPr>
+              <a:t>This gift of love </a:t>
+            </a:r>
+          </a:p>
+          <a:p>
+            <a:r>
+              <a:rPr lang="en-US" sz="5400" dirty="0">
+                <a:solidFill>
+                  <a:schemeClr val="bg1"/>
+                </a:solidFill>
+                <a:latin typeface="Avenir Medium" panose="02000503020000020003" pitchFamily="2" charset="0"/>
+                <a:ea typeface="Bodoni Ornaments" pitchFamily="2" charset="0"/>
+              </a:rPr>
+              <a:t>and righteousness</a:t>
+            </a:r>
+          </a:p>
+          <a:p>
+            <a:endParaRPr lang="en-US" sz="5400" dirty="0">
+              <a:solidFill>
+                <a:schemeClr val="bg1"/>
+              </a:solidFill>
+              <a:latin typeface="Avenir Medium" panose="02000503020000020003" pitchFamily="2" charset="0"/>
+              <a:ea typeface="Bodoni Ornaments" pitchFamily="2" charset="0"/>
+            </a:endParaRPr>
+          </a:p>
+          <a:p>
+            <a:r>
+              <a:rPr lang="en-US" sz="5400" dirty="0">
+                <a:solidFill>
+                  <a:schemeClr val="bg1"/>
+                </a:solidFill>
+                <a:latin typeface="Avenir Medium" panose="02000503020000020003" pitchFamily="2" charset="0"/>
+                <a:ea typeface="Bodoni Ornaments" pitchFamily="2" charset="0"/>
+              </a:rPr>
+              <a:t>Scorned by the ones </a:t>
+            </a:r>
+          </a:p>
+          <a:p>
+            <a:r>
+              <a:rPr lang="en-US" sz="5400" dirty="0">
+                <a:solidFill>
+                  <a:schemeClr val="bg1"/>
+                </a:solidFill>
+                <a:latin typeface="Avenir Medium" panose="02000503020000020003" pitchFamily="2" charset="0"/>
+                <a:ea typeface="Bodoni Ornaments" pitchFamily="2" charset="0"/>
+              </a:rPr>
+              <a:t>He came to save</a:t>
+            </a:r>
+          </a:p>
+          <a:p>
+            <a:endParaRPr lang="en-US" sz="5400" dirty="0">
+              <a:solidFill>
+                <a:schemeClr val="bg1"/>
+              </a:solidFill>
+              <a:latin typeface="Avenir Medium" panose="02000503020000020003" pitchFamily="2" charset="0"/>
+              <a:ea typeface="Bodoni Ornaments" pitchFamily="2" charset="0"/>
+            </a:endParaRPr>
+          </a:p>
+        </p:txBody>
+      </p:sp>
+    </p:spTree>
+    <p:extLst>
+      <p:ext uri="{BB962C8B-B14F-4D97-AF65-F5344CB8AC3E}">
+        <p14:creationId xmlns:p14="http://schemas.microsoft.com/office/powerpoint/2010/main" val="4286887665"/>
+      </p:ext>
+    </p:extLst>
+  </p:cSld>
+  <p:clrMapOvr>
+    <a:masterClrMapping/>
+  </p:clrMapOvr>
+</p:sld>
+</file>
+
+<file path=ppt/slides/slide8.xml><?xml version="1.0" encoding="utf-8"?>
 <p:sld xmlns:a="http://schemas.openxmlformats.org/drawingml/2006/main" xmlns:r="http://schemas.openxmlformats.org/officeDocument/2006/relationships" xmlns:p="http://schemas.openxmlformats.org/presentationml/2006/main">
   <p:cSld>
     <p:bg>
@@ -3676,7 +5275,7 @@
           <a:lstStyle/>
           <a:p>
             <a:br>
-              <a:rPr lang="en-US" sz="4000" dirty="0">
+              <a:rPr lang="en-US" sz="5400" dirty="0">
                 <a:solidFill>
                   <a:schemeClr val="bg1"/>
                 </a:solidFill>
@@ -3685,7 +5284,7 @@
               </a:rPr>
             </a:br>
             <a:r>
-              <a:rPr lang="en-US" sz="4000" dirty="0" err="1">
+              <a:rPr lang="en-US" sz="5400" dirty="0" err="1">
                 <a:solidFill>
                   <a:schemeClr val="bg1"/>
                 </a:solidFill>
@@ -3695,30 +5294,30 @@
               <a:t>'Til</a:t>
             </a:r>
             <a:r>
-              <a:rPr lang="en-US" sz="4000" dirty="0">
-                <a:solidFill>
-                  <a:schemeClr val="bg1"/>
-                </a:solidFill>
-                <a:latin typeface="Avenir Medium" panose="02000503020000020003" pitchFamily="2" charset="0"/>
-                <a:ea typeface="Bodoni Ornaments" pitchFamily="2" charset="0"/>
-              </a:rPr>
-              <a:t> on that cross as Jesus died</a:t>
-            </a:r>
-          </a:p>
-          <a:p>
-            <a:r>
-              <a:rPr lang="en-US" sz="4000" dirty="0">
-                <a:solidFill>
-                  <a:schemeClr val="bg1"/>
-                </a:solidFill>
-                <a:latin typeface="Avenir Medium" panose="02000503020000020003" pitchFamily="2" charset="0"/>
-                <a:ea typeface="Bodoni Ornaments" pitchFamily="2" charset="0"/>
-              </a:rPr>
-              <a:t>The wrath of God was satisfied</a:t>
-            </a:r>
-          </a:p>
-          <a:p>
-            <a:endParaRPr lang="en-US" sz="4000" dirty="0">
+              <a:rPr lang="en-US" sz="5400" dirty="0">
+                <a:solidFill>
+                  <a:schemeClr val="bg1"/>
+                </a:solidFill>
+                <a:latin typeface="Avenir Medium" panose="02000503020000020003" pitchFamily="2" charset="0"/>
+                <a:ea typeface="Bodoni Ornaments" pitchFamily="2" charset="0"/>
+              </a:rPr>
+              <a:t> on that cross </a:t>
+            </a:r>
+          </a:p>
+          <a:p>
+            <a:r>
+              <a:rPr lang="en-US" sz="5400" dirty="0">
+                <a:solidFill>
+                  <a:schemeClr val="bg1"/>
+                </a:solidFill>
+                <a:latin typeface="Avenir Medium" panose="02000503020000020003" pitchFamily="2" charset="0"/>
+                <a:ea typeface="Bodoni Ornaments" pitchFamily="2" charset="0"/>
+              </a:rPr>
+              <a:t>as Jesus died</a:t>
+            </a:r>
+          </a:p>
+          <a:p>
+            <a:endParaRPr lang="en-US" sz="5400" dirty="0">
               <a:solidFill>
                 <a:schemeClr val="bg1"/>
               </a:solidFill>
@@ -3728,30 +5327,30 @@
           </a:p>
           <a:p>
             <a:r>
-              <a:rPr lang="en-US" sz="4000" dirty="0">
-                <a:solidFill>
-                  <a:schemeClr val="bg1"/>
-                </a:solidFill>
-                <a:latin typeface="Avenir Medium" panose="02000503020000020003" pitchFamily="2" charset="0"/>
-                <a:ea typeface="Bodoni Ornaments" pitchFamily="2" charset="0"/>
-              </a:rPr>
-              <a:t>For every sin on Him was laid</a:t>
-            </a:r>
-          </a:p>
-          <a:p>
-            <a:r>
-              <a:rPr lang="en-US" sz="4000" dirty="0">
-                <a:solidFill>
-                  <a:schemeClr val="bg1"/>
-                </a:solidFill>
-                <a:latin typeface="Avenir Medium" panose="02000503020000020003" pitchFamily="2" charset="0"/>
-                <a:ea typeface="Bodoni Ornaments" pitchFamily="2" charset="0"/>
-              </a:rPr>
-              <a:t>Here in the death of Christ I live</a:t>
-            </a:r>
-          </a:p>
-          <a:p>
-            <a:endParaRPr lang="en-US" sz="4000" dirty="0">
+              <a:rPr lang="en-US" sz="5400" dirty="0">
+                <a:solidFill>
+                  <a:schemeClr val="bg1"/>
+                </a:solidFill>
+                <a:latin typeface="Avenir Medium" panose="02000503020000020003" pitchFamily="2" charset="0"/>
+                <a:ea typeface="Bodoni Ornaments" pitchFamily="2" charset="0"/>
+              </a:rPr>
+              <a:t>The wrath of God </a:t>
+            </a:r>
+          </a:p>
+          <a:p>
+            <a:r>
+              <a:rPr lang="en-US" sz="5400" dirty="0">
+                <a:solidFill>
+                  <a:schemeClr val="bg1"/>
+                </a:solidFill>
+                <a:latin typeface="Avenir Medium" panose="02000503020000020003" pitchFamily="2" charset="0"/>
+                <a:ea typeface="Bodoni Ornaments" pitchFamily="2" charset="0"/>
+              </a:rPr>
+              <a:t>was satisfied</a:t>
+            </a:r>
+          </a:p>
+          <a:p>
+            <a:endParaRPr lang="en-US" sz="5400" dirty="0">
               <a:solidFill>
                 <a:schemeClr val="bg1"/>
               </a:solidFill>
@@ -3759,81 +5358,8 @@
               <a:ea typeface="Bodoni Ornaments" pitchFamily="2" charset="0"/>
             </a:endParaRPr>
           </a:p>
-        </p:txBody>
-      </p:sp>
-    </p:spTree>
-    <p:extLst>
-      <p:ext uri="{BB962C8B-B14F-4D97-AF65-F5344CB8AC3E}">
-        <p14:creationId xmlns:p14="http://schemas.microsoft.com/office/powerpoint/2010/main" val="2361877049"/>
-      </p:ext>
-    </p:extLst>
-  </p:cSld>
-  <p:clrMapOvr>
-    <a:masterClrMapping/>
-  </p:clrMapOvr>
-</p:sld>
-</file>
-
-<file path=ppt/slides/slide6.xml><?xml version="1.0" encoding="utf-8"?>
-<p:sld xmlns:a="http://schemas.openxmlformats.org/drawingml/2006/main" xmlns:r="http://schemas.openxmlformats.org/officeDocument/2006/relationships" xmlns:p="http://schemas.openxmlformats.org/presentationml/2006/main">
-  <p:cSld>
-    <p:bg>
-      <p:bgPr>
-        <a:solidFill>
-          <a:schemeClr val="tx1"/>
-        </a:solidFill>
-        <a:effectLst/>
-      </p:bgPr>
-    </p:bg>
-    <p:spTree>
-      <p:nvGrpSpPr>
-        <p:cNvPr id="1" name="">
-          <a:extLst>
-            <a:ext uri="{FF2B5EF4-FFF2-40B4-BE49-F238E27FC236}">
-              <a16:creationId xmlns:a16="http://schemas.microsoft.com/office/drawing/2014/main" id="{C13C3BBB-7C3C-80B5-E4A0-353049B1067D}"/>
-            </a:ext>
-          </a:extLst>
-        </p:cNvPr>
-        <p:cNvGrpSpPr/>
-        <p:nvPr/>
-      </p:nvGrpSpPr>
-      <p:grpSpPr>
-        <a:xfrm>
-          <a:off x="0" y="0"/>
-          <a:ext cx="0" cy="0"/>
-          <a:chOff x="0" y="0"/>
-          <a:chExt cx="0" cy="0"/>
-        </a:xfrm>
-      </p:grpSpPr>
-      <p:sp>
-        <p:nvSpPr>
-          <p:cNvPr id="3" name="Subtitle 2">
-            <a:extLst>
-              <a:ext uri="{FF2B5EF4-FFF2-40B4-BE49-F238E27FC236}">
-                <a16:creationId xmlns:a16="http://schemas.microsoft.com/office/drawing/2014/main" id="{60DF2A09-4C27-862D-54B0-293E9F271CB0}"/>
-              </a:ext>
-            </a:extLst>
-          </p:cNvPr>
-          <p:cNvSpPr>
-            <a:spLocks noGrp="1"/>
-          </p:cNvSpPr>
-          <p:nvPr>
-            <p:ph type="subTitle" idx="1"/>
-          </p:nvPr>
-        </p:nvSpPr>
-        <p:spPr>
-          <a:xfrm>
-            <a:off x="84221" y="213360"/>
-            <a:ext cx="8891337" cy="6416040"/>
-          </a:xfrm>
-        </p:spPr>
-        <p:txBody>
-          <a:bodyPr>
-            <a:noAutofit/>
-          </a:bodyPr>
-          <a:lstStyle/>
-          <a:p>
-            <a:endParaRPr lang="en-US" sz="4000" dirty="0">
+          <a:p>
+            <a:endParaRPr lang="en-US" sz="5400" dirty="0">
               <a:solidFill>
                 <a:schemeClr val="bg1"/>
               </a:solidFill>
@@ -3841,398 +5367,12 @@
               <a:ea typeface="Bodoni Ornaments" pitchFamily="2" charset="0"/>
             </a:endParaRPr>
           </a:p>
-          <a:p>
-            <a:r>
-              <a:rPr lang="en-US" sz="4000" dirty="0">
-                <a:solidFill>
-                  <a:schemeClr val="bg1"/>
-                </a:solidFill>
-                <a:latin typeface="Avenir Medium" panose="02000503020000020003" pitchFamily="2" charset="0"/>
-                <a:ea typeface="Bodoni Ornaments" pitchFamily="2" charset="0"/>
-              </a:rPr>
-              <a:t>There in the ground His body lay</a:t>
-            </a:r>
-          </a:p>
-          <a:p>
-            <a:r>
-              <a:rPr lang="en-US" sz="4000" dirty="0">
-                <a:solidFill>
-                  <a:schemeClr val="bg1"/>
-                </a:solidFill>
-                <a:latin typeface="Avenir Medium" panose="02000503020000020003" pitchFamily="2" charset="0"/>
-                <a:ea typeface="Bodoni Ornaments" pitchFamily="2" charset="0"/>
-              </a:rPr>
-              <a:t>Light of the world by darkness slain</a:t>
-            </a:r>
-          </a:p>
-          <a:p>
-            <a:endParaRPr lang="en-US" sz="4000" dirty="0">
-              <a:solidFill>
-                <a:schemeClr val="bg1"/>
-              </a:solidFill>
-              <a:latin typeface="Avenir Medium" panose="02000503020000020003" pitchFamily="2" charset="0"/>
-              <a:ea typeface="Bodoni Ornaments" pitchFamily="2" charset="0"/>
-            </a:endParaRPr>
-          </a:p>
-          <a:p>
-            <a:r>
-              <a:rPr lang="en-US" sz="4000" dirty="0">
-                <a:solidFill>
-                  <a:schemeClr val="bg1"/>
-                </a:solidFill>
-                <a:latin typeface="Avenir Medium" panose="02000503020000020003" pitchFamily="2" charset="0"/>
-                <a:ea typeface="Bodoni Ornaments" pitchFamily="2" charset="0"/>
-              </a:rPr>
-              <a:t>Then bursting forth in glorious day</a:t>
-            </a:r>
-          </a:p>
-          <a:p>
-            <a:r>
-              <a:rPr lang="en-US" sz="4000" dirty="0">
-                <a:solidFill>
-                  <a:schemeClr val="bg1"/>
-                </a:solidFill>
-                <a:latin typeface="Avenir Medium" panose="02000503020000020003" pitchFamily="2" charset="0"/>
-                <a:ea typeface="Bodoni Ornaments" pitchFamily="2" charset="0"/>
-              </a:rPr>
-              <a:t>Up from the grave He rose again</a:t>
-            </a:r>
-          </a:p>
-          <a:p>
-            <a:endParaRPr lang="en-US" sz="4000" dirty="0">
-              <a:solidFill>
-                <a:schemeClr val="bg1"/>
-              </a:solidFill>
-              <a:latin typeface="Avenir Medium" panose="02000503020000020003" pitchFamily="2" charset="0"/>
-              <a:ea typeface="Bodoni Ornaments" pitchFamily="2" charset="0"/>
-            </a:endParaRPr>
-          </a:p>
         </p:txBody>
       </p:sp>
     </p:spTree>
     <p:extLst>
       <p:ext uri="{BB962C8B-B14F-4D97-AF65-F5344CB8AC3E}">
-        <p14:creationId xmlns:p14="http://schemas.microsoft.com/office/powerpoint/2010/main" val="1368886024"/>
-      </p:ext>
-    </p:extLst>
-  </p:cSld>
-  <p:clrMapOvr>
-    <a:masterClrMapping/>
-  </p:clrMapOvr>
-</p:sld>
-</file>
-
-<file path=ppt/slides/slide7.xml><?xml version="1.0" encoding="utf-8"?>
-<p:sld xmlns:a="http://schemas.openxmlformats.org/drawingml/2006/main" xmlns:r="http://schemas.openxmlformats.org/officeDocument/2006/relationships" xmlns:p="http://schemas.openxmlformats.org/presentationml/2006/main">
-  <p:cSld>
-    <p:bg>
-      <p:bgPr>
-        <a:solidFill>
-          <a:schemeClr val="tx1"/>
-        </a:solidFill>
-        <a:effectLst/>
-      </p:bgPr>
-    </p:bg>
-    <p:spTree>
-      <p:nvGrpSpPr>
-        <p:cNvPr id="1" name="">
-          <a:extLst>
-            <a:ext uri="{FF2B5EF4-FFF2-40B4-BE49-F238E27FC236}">
-              <a16:creationId xmlns:a16="http://schemas.microsoft.com/office/drawing/2014/main" id="{FD765EF3-C2FF-F3C9-66CA-B560CA559FAB}"/>
-            </a:ext>
-          </a:extLst>
-        </p:cNvPr>
-        <p:cNvGrpSpPr/>
-        <p:nvPr/>
-      </p:nvGrpSpPr>
-      <p:grpSpPr>
-        <a:xfrm>
-          <a:off x="0" y="0"/>
-          <a:ext cx="0" cy="0"/>
-          <a:chOff x="0" y="0"/>
-          <a:chExt cx="0" cy="0"/>
-        </a:xfrm>
-      </p:grpSpPr>
-      <p:sp>
-        <p:nvSpPr>
-          <p:cNvPr id="3" name="Subtitle 2">
-            <a:extLst>
-              <a:ext uri="{FF2B5EF4-FFF2-40B4-BE49-F238E27FC236}">
-                <a16:creationId xmlns:a16="http://schemas.microsoft.com/office/drawing/2014/main" id="{54D63EE1-8E59-B471-BDE1-9B7BBDF34087}"/>
-              </a:ext>
-            </a:extLst>
-          </p:cNvPr>
-          <p:cNvSpPr>
-            <a:spLocks noGrp="1"/>
-          </p:cNvSpPr>
-          <p:nvPr>
-            <p:ph type="subTitle" idx="1"/>
-          </p:nvPr>
-        </p:nvSpPr>
-        <p:spPr>
-          <a:xfrm>
-            <a:off x="84221" y="213360"/>
-            <a:ext cx="8891337" cy="6416040"/>
-          </a:xfrm>
-        </p:spPr>
-        <p:txBody>
-          <a:bodyPr>
-            <a:noAutofit/>
-          </a:bodyPr>
-          <a:lstStyle/>
-          <a:p>
-            <a:endParaRPr lang="en-US" sz="4000" dirty="0">
-              <a:solidFill>
-                <a:schemeClr val="bg1"/>
-              </a:solidFill>
-              <a:latin typeface="Avenir Medium" panose="02000503020000020003" pitchFamily="2" charset="0"/>
-              <a:ea typeface="Bodoni Ornaments" pitchFamily="2" charset="0"/>
-            </a:endParaRPr>
-          </a:p>
-          <a:p>
-            <a:r>
-              <a:rPr lang="en-US" sz="4000" dirty="0">
-                <a:solidFill>
-                  <a:schemeClr val="bg1"/>
-                </a:solidFill>
-                <a:latin typeface="Avenir Medium" panose="02000503020000020003" pitchFamily="2" charset="0"/>
-                <a:ea typeface="Bodoni Ornaments" pitchFamily="2" charset="0"/>
-              </a:rPr>
-              <a:t>And as He stands in victory</a:t>
-            </a:r>
-          </a:p>
-          <a:p>
-            <a:r>
-              <a:rPr lang="en-US" sz="4000" dirty="0">
-                <a:solidFill>
-                  <a:schemeClr val="bg1"/>
-                </a:solidFill>
-                <a:latin typeface="Avenir Medium" panose="02000503020000020003" pitchFamily="2" charset="0"/>
-                <a:ea typeface="Bodoni Ornaments" pitchFamily="2" charset="0"/>
-              </a:rPr>
-              <a:t>Sin's curse has lost its grip on me</a:t>
-            </a:r>
-          </a:p>
-          <a:p>
-            <a:endParaRPr lang="en-US" sz="4000" dirty="0">
-              <a:solidFill>
-                <a:schemeClr val="bg1"/>
-              </a:solidFill>
-              <a:latin typeface="Avenir Medium" panose="02000503020000020003" pitchFamily="2" charset="0"/>
-              <a:ea typeface="Bodoni Ornaments" pitchFamily="2" charset="0"/>
-            </a:endParaRPr>
-          </a:p>
-          <a:p>
-            <a:r>
-              <a:rPr lang="en-US" sz="4000" dirty="0">
-                <a:solidFill>
-                  <a:schemeClr val="bg1"/>
-                </a:solidFill>
-                <a:latin typeface="Avenir Medium" panose="02000503020000020003" pitchFamily="2" charset="0"/>
-                <a:ea typeface="Bodoni Ornaments" pitchFamily="2" charset="0"/>
-              </a:rPr>
-              <a:t>For I am His and He is mine</a:t>
-            </a:r>
-          </a:p>
-          <a:p>
-            <a:r>
-              <a:rPr lang="en-US" sz="4000" dirty="0">
-                <a:solidFill>
-                  <a:schemeClr val="bg1"/>
-                </a:solidFill>
-                <a:latin typeface="Avenir Medium" panose="02000503020000020003" pitchFamily="2" charset="0"/>
-                <a:ea typeface="Bodoni Ornaments" pitchFamily="2" charset="0"/>
-              </a:rPr>
-              <a:t>Bought with the </a:t>
-            </a:r>
-          </a:p>
-          <a:p>
-            <a:r>
-              <a:rPr lang="en-US" sz="4000" dirty="0">
-                <a:solidFill>
-                  <a:schemeClr val="bg1"/>
-                </a:solidFill>
-                <a:latin typeface="Avenir Medium" panose="02000503020000020003" pitchFamily="2" charset="0"/>
-                <a:ea typeface="Bodoni Ornaments" pitchFamily="2" charset="0"/>
-              </a:rPr>
-              <a:t>precious blood of Christ</a:t>
-            </a:r>
-          </a:p>
-          <a:p>
-            <a:endParaRPr lang="en-US" sz="4000" dirty="0">
-              <a:solidFill>
-                <a:schemeClr val="bg1"/>
-              </a:solidFill>
-              <a:latin typeface="Avenir Medium" panose="02000503020000020003" pitchFamily="2" charset="0"/>
-              <a:ea typeface="Bodoni Ornaments" pitchFamily="2" charset="0"/>
-            </a:endParaRPr>
-          </a:p>
-        </p:txBody>
-      </p:sp>
-    </p:spTree>
-    <p:extLst>
-      <p:ext uri="{BB962C8B-B14F-4D97-AF65-F5344CB8AC3E}">
-        <p14:creationId xmlns:p14="http://schemas.microsoft.com/office/powerpoint/2010/main" val="3928842181"/>
-      </p:ext>
-    </p:extLst>
-  </p:cSld>
-  <p:clrMapOvr>
-    <a:masterClrMapping/>
-  </p:clrMapOvr>
-</p:sld>
-</file>
-
-<file path=ppt/slides/slide8.xml><?xml version="1.0" encoding="utf-8"?>
-<p:sld xmlns:a="http://schemas.openxmlformats.org/drawingml/2006/main" xmlns:r="http://schemas.openxmlformats.org/officeDocument/2006/relationships" xmlns:p="http://schemas.openxmlformats.org/presentationml/2006/main">
-  <p:cSld>
-    <p:bg>
-      <p:bgPr>
-        <a:solidFill>
-          <a:schemeClr val="tx1"/>
-        </a:solidFill>
-        <a:effectLst/>
-      </p:bgPr>
-    </p:bg>
-    <p:spTree>
-      <p:nvGrpSpPr>
-        <p:cNvPr id="1" name="">
-          <a:extLst>
-            <a:ext uri="{FF2B5EF4-FFF2-40B4-BE49-F238E27FC236}">
-              <a16:creationId xmlns:a16="http://schemas.microsoft.com/office/drawing/2014/main" id="{3F4BEF13-813B-B3FE-9DEA-CD2FF5E43C11}"/>
-            </a:ext>
-          </a:extLst>
-        </p:cNvPr>
-        <p:cNvGrpSpPr/>
-        <p:nvPr/>
-      </p:nvGrpSpPr>
-      <p:grpSpPr>
-        <a:xfrm>
-          <a:off x="0" y="0"/>
-          <a:ext cx="0" cy="0"/>
-          <a:chOff x="0" y="0"/>
-          <a:chExt cx="0" cy="0"/>
-        </a:xfrm>
-      </p:grpSpPr>
-      <p:sp>
-        <p:nvSpPr>
-          <p:cNvPr id="3" name="Subtitle 2">
-            <a:extLst>
-              <a:ext uri="{FF2B5EF4-FFF2-40B4-BE49-F238E27FC236}">
-                <a16:creationId xmlns:a16="http://schemas.microsoft.com/office/drawing/2014/main" id="{61F13E3C-7D24-C10B-5DD8-9F69A7C145BF}"/>
-              </a:ext>
-            </a:extLst>
-          </p:cNvPr>
-          <p:cNvSpPr>
-            <a:spLocks noGrp="1"/>
-          </p:cNvSpPr>
-          <p:nvPr>
-            <p:ph type="subTitle" idx="1"/>
-          </p:nvPr>
-        </p:nvSpPr>
-        <p:spPr>
-          <a:xfrm>
-            <a:off x="84221" y="213360"/>
-            <a:ext cx="8891337" cy="6416040"/>
-          </a:xfrm>
-        </p:spPr>
-        <p:txBody>
-          <a:bodyPr>
-            <a:noAutofit/>
-          </a:bodyPr>
-          <a:lstStyle/>
-          <a:p>
-            <a:endParaRPr lang="en-US" sz="4000" dirty="0">
-              <a:solidFill>
-                <a:schemeClr val="bg1"/>
-              </a:solidFill>
-              <a:latin typeface="Avenir Medium" panose="02000503020000020003" pitchFamily="2" charset="0"/>
-              <a:ea typeface="Bodoni Ornaments" pitchFamily="2" charset="0"/>
-            </a:endParaRPr>
-          </a:p>
-          <a:p>
-            <a:r>
-              <a:rPr lang="en-US" sz="4000" dirty="0">
-                <a:solidFill>
-                  <a:schemeClr val="bg1"/>
-                </a:solidFill>
-                <a:latin typeface="Avenir Medium" panose="02000503020000020003" pitchFamily="2" charset="0"/>
-                <a:ea typeface="Bodoni Ornaments" pitchFamily="2" charset="0"/>
-              </a:rPr>
-              <a:t>No guilt of life, </a:t>
-            </a:r>
-          </a:p>
-          <a:p>
-            <a:r>
-              <a:rPr lang="en-US" sz="4000" dirty="0">
-                <a:solidFill>
-                  <a:schemeClr val="bg1"/>
-                </a:solidFill>
-                <a:latin typeface="Avenir Medium" panose="02000503020000020003" pitchFamily="2" charset="0"/>
-                <a:ea typeface="Bodoni Ornaments" pitchFamily="2" charset="0"/>
-              </a:rPr>
-              <a:t>no fear in death</a:t>
-            </a:r>
-          </a:p>
-          <a:p>
-            <a:r>
-              <a:rPr lang="en-US" sz="4000" dirty="0">
-                <a:solidFill>
-                  <a:schemeClr val="bg1"/>
-                </a:solidFill>
-                <a:latin typeface="Avenir Medium" panose="02000503020000020003" pitchFamily="2" charset="0"/>
-                <a:ea typeface="Bodoni Ornaments" pitchFamily="2" charset="0"/>
-              </a:rPr>
-              <a:t>This is the power of Christ in me</a:t>
-            </a:r>
-          </a:p>
-          <a:p>
-            <a:endParaRPr lang="en-US" sz="4000" dirty="0">
-              <a:solidFill>
-                <a:schemeClr val="bg1"/>
-              </a:solidFill>
-              <a:latin typeface="Avenir Medium" panose="02000503020000020003" pitchFamily="2" charset="0"/>
-              <a:ea typeface="Bodoni Ornaments" pitchFamily="2" charset="0"/>
-            </a:endParaRPr>
-          </a:p>
-          <a:p>
-            <a:r>
-              <a:rPr lang="en-US" sz="4000" dirty="0">
-                <a:solidFill>
-                  <a:schemeClr val="bg1"/>
-                </a:solidFill>
-                <a:latin typeface="Avenir Medium" panose="02000503020000020003" pitchFamily="2" charset="0"/>
-                <a:ea typeface="Bodoni Ornaments" pitchFamily="2" charset="0"/>
-              </a:rPr>
-              <a:t>From life's first cry to final breath</a:t>
-            </a:r>
-          </a:p>
-          <a:p>
-            <a:r>
-              <a:rPr lang="en-US" sz="4000" dirty="0">
-                <a:solidFill>
-                  <a:schemeClr val="bg1"/>
-                </a:solidFill>
-                <a:latin typeface="Avenir Medium" panose="02000503020000020003" pitchFamily="2" charset="0"/>
-                <a:ea typeface="Bodoni Ornaments" pitchFamily="2" charset="0"/>
-              </a:rPr>
-              <a:t>Jesus commands my destiny</a:t>
-            </a:r>
-          </a:p>
-          <a:p>
-            <a:endParaRPr lang="en-US" sz="4000" dirty="0">
-              <a:solidFill>
-                <a:schemeClr val="bg1"/>
-              </a:solidFill>
-              <a:latin typeface="Avenir Medium" panose="02000503020000020003" pitchFamily="2" charset="0"/>
-              <a:ea typeface="Bodoni Ornaments" pitchFamily="2" charset="0"/>
-            </a:endParaRPr>
-          </a:p>
-        </p:txBody>
-      </p:sp>
-    </p:spTree>
-    <p:extLst>
-      <p:ext uri="{BB962C8B-B14F-4D97-AF65-F5344CB8AC3E}">
-        <p14:creationId xmlns:p14="http://schemas.microsoft.com/office/powerpoint/2010/main" val="681893626"/>
+        <p14:creationId xmlns:p14="http://schemas.microsoft.com/office/powerpoint/2010/main" val="2361877049"/>
       </p:ext>
     </p:extLst>
   </p:cSld>
@@ -4258,7 +5398,7 @@
         <p:cNvPr id="1" name="">
           <a:extLst>
             <a:ext uri="{FF2B5EF4-FFF2-40B4-BE49-F238E27FC236}">
-              <a16:creationId xmlns:a16="http://schemas.microsoft.com/office/drawing/2014/main" id="{41D279BA-1B08-2776-8F03-904F6B909B56}"/>
+              <a16:creationId xmlns:a16="http://schemas.microsoft.com/office/drawing/2014/main" id="{9610E142-03C5-577F-81B0-323FBA94D344}"/>
             </a:ext>
           </a:extLst>
         </p:cNvPr>
@@ -4278,7 +5418,7 @@
           <p:cNvPr id="3" name="Subtitle 2">
             <a:extLst>
               <a:ext uri="{FF2B5EF4-FFF2-40B4-BE49-F238E27FC236}">
-                <a16:creationId xmlns:a16="http://schemas.microsoft.com/office/drawing/2014/main" id="{1AC98A3D-8585-53B3-0825-C175A8E81B1F}"/>
+                <a16:creationId xmlns:a16="http://schemas.microsoft.com/office/drawing/2014/main" id="{BA9D29B0-2088-F18F-E692-B66534748DE1}"/>
               </a:ext>
             </a:extLst>
           </p:cNvPr>
@@ -4301,7 +5441,7 @@
           </a:bodyPr>
           <a:lstStyle/>
           <a:p>
-            <a:endParaRPr lang="en-US" sz="4000" dirty="0">
+            <a:endParaRPr lang="en-US" sz="5400" dirty="0">
               <a:solidFill>
                 <a:schemeClr val="bg1"/>
               </a:solidFill>
@@ -4311,42 +5451,30 @@
           </a:p>
           <a:p>
             <a:r>
-              <a:rPr lang="en-US" sz="4000" dirty="0">
-                <a:solidFill>
-                  <a:schemeClr val="bg1"/>
-                </a:solidFill>
-                <a:latin typeface="Avenir Medium" panose="02000503020000020003" pitchFamily="2" charset="0"/>
-                <a:ea typeface="Bodoni Ornaments" pitchFamily="2" charset="0"/>
-              </a:rPr>
-              <a:t>No power of hell, </a:t>
-            </a:r>
-          </a:p>
-          <a:p>
-            <a:r>
-              <a:rPr lang="en-US" sz="4000" dirty="0">
-                <a:solidFill>
-                  <a:schemeClr val="bg1"/>
-                </a:solidFill>
-                <a:latin typeface="Avenir Medium" panose="02000503020000020003" pitchFamily="2" charset="0"/>
-                <a:ea typeface="Bodoni Ornaments" pitchFamily="2" charset="0"/>
-              </a:rPr>
-              <a:t>no scheme of man</a:t>
-            </a:r>
-          </a:p>
-          <a:p>
-            <a:r>
-              <a:rPr lang="en-US" sz="4000" dirty="0">
-                <a:solidFill>
-                  <a:schemeClr val="bg1"/>
-                </a:solidFill>
-                <a:latin typeface="Avenir Medium" panose="02000503020000020003" pitchFamily="2" charset="0"/>
-                <a:ea typeface="Bodoni Ornaments" pitchFamily="2" charset="0"/>
-              </a:rPr>
-              <a:t>Can ever pluck me from His hand</a:t>
-            </a:r>
-          </a:p>
-          <a:p>
-            <a:endParaRPr lang="en-US" sz="4000" dirty="0">
+              <a:rPr lang="en-US" sz="5400" dirty="0">
+                <a:solidFill>
+                  <a:schemeClr val="bg1"/>
+                </a:solidFill>
+                <a:latin typeface="Avenir Medium" panose="02000503020000020003" pitchFamily="2" charset="0"/>
+                <a:ea typeface="Bodoni Ornaments" pitchFamily="2" charset="0"/>
+              </a:rPr>
+              <a:t>For every sin </a:t>
+            </a:r>
+          </a:p>
+          <a:p>
+            <a:r>
+              <a:rPr lang="en-US" sz="5400" dirty="0">
+                <a:solidFill>
+                  <a:schemeClr val="bg1"/>
+                </a:solidFill>
+                <a:latin typeface="Avenir Medium" panose="02000503020000020003" pitchFamily="2" charset="0"/>
+                <a:ea typeface="Bodoni Ornaments" pitchFamily="2" charset="0"/>
+              </a:rPr>
+              <a:t>on Him was laid</a:t>
+            </a:r>
+          </a:p>
+          <a:p>
+            <a:endParaRPr lang="en-US" sz="5400" dirty="0">
               <a:solidFill>
                 <a:schemeClr val="bg1"/>
               </a:solidFill>
@@ -4356,72 +5484,30 @@
           </a:p>
           <a:p>
             <a:r>
-              <a:rPr lang="en-US" sz="4000" dirty="0" err="1">
-                <a:solidFill>
-                  <a:schemeClr val="bg1"/>
-                </a:solidFill>
-                <a:latin typeface="Avenir Medium" panose="02000503020000020003" pitchFamily="2" charset="0"/>
-                <a:ea typeface="Bodoni Ornaments" pitchFamily="2" charset="0"/>
-              </a:rPr>
-              <a:t>'Til</a:t>
-            </a:r>
-            <a:r>
-              <a:rPr lang="en-US" sz="4000" dirty="0">
-                <a:solidFill>
-                  <a:schemeClr val="bg1"/>
-                </a:solidFill>
-                <a:latin typeface="Avenir Medium" panose="02000503020000020003" pitchFamily="2" charset="0"/>
-                <a:ea typeface="Bodoni Ornaments" pitchFamily="2" charset="0"/>
-              </a:rPr>
-              <a:t> He returns or calls me home</a:t>
-            </a:r>
-          </a:p>
-          <a:p>
-            <a:r>
-              <a:rPr lang="en-US" sz="4000" dirty="0">
-                <a:solidFill>
-                  <a:schemeClr val="bg1"/>
-                </a:solidFill>
-                <a:latin typeface="Avenir Medium" panose="02000503020000020003" pitchFamily="2" charset="0"/>
-                <a:ea typeface="Bodoni Ornaments" pitchFamily="2" charset="0"/>
-              </a:rPr>
-              <a:t>Here in the power </a:t>
-            </a:r>
-            <a:r>
-              <a:rPr lang="en-US" sz="4000">
-                <a:solidFill>
-                  <a:schemeClr val="bg1"/>
-                </a:solidFill>
-                <a:latin typeface="Avenir Medium" panose="02000503020000020003" pitchFamily="2" charset="0"/>
-                <a:ea typeface="Bodoni Ornaments" pitchFamily="2" charset="0"/>
-              </a:rPr>
-              <a:t>of </a:t>
-            </a:r>
-          </a:p>
-          <a:p>
-            <a:r>
-              <a:rPr lang="en-US" sz="4000">
-                <a:solidFill>
-                  <a:schemeClr val="bg1"/>
-                </a:solidFill>
-                <a:latin typeface="Avenir Medium" panose="02000503020000020003" pitchFamily="2" charset="0"/>
-                <a:ea typeface="Bodoni Ornaments" pitchFamily="2" charset="0"/>
-              </a:rPr>
-              <a:t>Christ </a:t>
-            </a:r>
-            <a:r>
-              <a:rPr lang="en-US" sz="4000" dirty="0">
-                <a:solidFill>
-                  <a:schemeClr val="bg1"/>
-                </a:solidFill>
-                <a:latin typeface="Avenir Medium" panose="02000503020000020003" pitchFamily="2" charset="0"/>
-                <a:ea typeface="Bodoni Ornaments" pitchFamily="2" charset="0"/>
-              </a:rPr>
-              <a:t>I'll stand</a:t>
-            </a:r>
-          </a:p>
-          <a:p>
-            <a:endParaRPr lang="en-US" sz="4000" dirty="0">
+              <a:rPr lang="en-US" sz="5400" dirty="0">
+                <a:solidFill>
+                  <a:schemeClr val="bg1"/>
+                </a:solidFill>
+                <a:latin typeface="Avenir Medium" panose="02000503020000020003" pitchFamily="2" charset="0"/>
+                <a:ea typeface="Bodoni Ornaments" pitchFamily="2" charset="0"/>
+              </a:rPr>
+              <a:t>Here in the death of Christ </a:t>
+            </a:r>
+          </a:p>
+          <a:p>
+            <a:r>
+              <a:rPr lang="en-US" sz="5400" dirty="0">
+                <a:solidFill>
+                  <a:schemeClr val="bg1"/>
+                </a:solidFill>
+                <a:latin typeface="Avenir Medium" panose="02000503020000020003" pitchFamily="2" charset="0"/>
+                <a:ea typeface="Bodoni Ornaments" pitchFamily="2" charset="0"/>
+              </a:rPr>
+              <a:t>I live</a:t>
+            </a:r>
+          </a:p>
+          <a:p>
+            <a:endParaRPr lang="en-US" sz="5400" dirty="0">
               <a:solidFill>
                 <a:schemeClr val="bg1"/>
               </a:solidFill>
@@ -4434,7 +5520,7 @@
     </p:spTree>
     <p:extLst>
       <p:ext uri="{BB962C8B-B14F-4D97-AF65-F5344CB8AC3E}">
-        <p14:creationId xmlns:p14="http://schemas.microsoft.com/office/powerpoint/2010/main" val="1818851335"/>
+        <p14:creationId xmlns:p14="http://schemas.microsoft.com/office/powerpoint/2010/main" val="3754333495"/>
       </p:ext>
     </p:extLst>
   </p:cSld>
